--- a/modules/Basic_R/Basic_R.pptx
+++ b/modules/Basic_R/Basic_R.pptx
@@ -9369,7 +9369,7 @@
               <a:rPr>
                 <a:latin typeface="Courier"/>
               </a:rPr>
-              <a:t>[1] 14 80 88 23 42</a:t>
+              <a:t>[1] 96 32 66 31 65</a:t>
             </a:r>
           </a:p>
         </p:txBody>

--- a/modules/Basic_R/Basic_R.pptx
+++ b/modules/Basic_R/Basic_R.pptx
@@ -51,6 +51,7 @@
     <p:sldId id="299" r:id="rId45"/>
     <p:sldId id="300" r:id="rId46"/>
     <p:sldId id="301" r:id="rId47"/>
+    <p:sldId id="302" r:id="rId48"/>
   </p:sldIdLst>
   <p:sldSz cx="9144000" cy="5143500" type="screen16x9"/>
   <p:notesSz cx="6858000" cy="9144000"/>
@@ -4258,23 +4259,31 @@
             </a:pPr>
             <a:r>
               <a:rPr/>
-              <a:t>Simple</a:t>
-            </a:r>
-            <a:r>
-              <a:rPr/>
-              <a:t> </a:t>
-            </a:r>
-            <a:r>
-              <a:rPr/>
-              <a:t>object</a:t>
-            </a:r>
-            <a:r>
-              <a:rPr/>
-              <a:t> </a:t>
-            </a:r>
-            <a:r>
-              <a:rPr/>
-              <a:t>practice</a:t>
+              <a:t>TROUBLESHOOTING:</a:t>
+            </a:r>
+            <a:r>
+              <a:rPr/>
+              <a:t> </a:t>
+            </a:r>
+            <a:r>
+              <a:rPr/>
+              <a:t>Zoom</a:t>
+            </a:r>
+            <a:r>
+              <a:rPr/>
+              <a:t> </a:t>
+            </a:r>
+            <a:r>
+              <a:rPr/>
+              <a:t>Quotation</a:t>
+            </a:r>
+            <a:r>
+              <a:rPr/>
+              <a:t> </a:t>
+            </a:r>
+            <a:r>
+              <a:rPr/>
+              <a:t>Marks</a:t>
             </a:r>
           </a:p>
         </p:txBody>
@@ -4294,18 +4303,101 @@
           <a:bodyPr/>
           <a:lstStyle/>
           <a:p>
+            <a:pPr lvl="0" indent="0">
+              <a:buNone/>
+            </a:pPr>
+            <a:r>
+              <a:rPr>
+                <a:latin typeface="Courier"/>
+              </a:rPr>
+              <a:t>y </a:t>
+            </a:r>
+            <a:r>
+              <a:rPr>
+                <a:solidFill>
+                  <a:srgbClr val="007020"/>
+                </a:solidFill>
+                <a:latin typeface="Courier"/>
+              </a:rPr>
+              <a:t>&lt;-</a:t>
+            </a:r>
+            <a:r>
+              <a:rPr>
+                <a:latin typeface="Courier"/>
+              </a:rPr>
+              <a:t> “hello world</a:t>
+            </a:r>
+            <a:r>
+              <a:rPr>
+                <a:solidFill>
+                  <a:srgbClr val="4070A0"/>
+                </a:solidFill>
+                <a:latin typeface="Courier"/>
+              </a:rPr>
+              <a:t>!</a:t>
+            </a:r>
+            <a:r>
+              <a:rPr>
+                <a:latin typeface="Courier"/>
+              </a:rPr>
+              <a:t>”</a:t>
+            </a:r>
+          </a:p>
+          <a:p>
+            <a:pPr lvl="0" indent="0">
+              <a:buNone/>
+            </a:pPr>
+            <a:r>
+              <a:rPr>
+                <a:latin typeface="Courier"/>
+              </a:rPr>
+              <a:t>Error in parse(text = input): &lt;text&gt;:1:6: unexpected input
+1: y &lt;- “
+         ^</a:t>
+            </a:r>
+          </a:p>
+          <a:p>
             <a:pPr lvl="0" marL="0" indent="0">
               <a:buNone/>
             </a:pPr>
             <a:r>
               <a:rPr/>
-              <a:t>Try assigning your full name to an R object called </a:t>
-            </a:r>
-            <a:r>
-              <a:rPr>
-                <a:latin typeface="Courier"/>
-              </a:rPr>
-              <a:t>name</a:t>
+              <a:t>Retype the quotation marks!</a:t>
+            </a:r>
+          </a:p>
+          <a:p>
+            <a:pPr lvl="0" indent="0">
+              <a:buNone/>
+            </a:pPr>
+            <a:r>
+              <a:rPr>
+                <a:latin typeface="Courier"/>
+              </a:rPr>
+              <a:t>y </a:t>
+            </a:r>
+            <a:r>
+              <a:rPr>
+                <a:solidFill>
+                  <a:srgbClr val="007020"/>
+                </a:solidFill>
+                <a:latin typeface="Courier"/>
+              </a:rPr>
+              <a:t>&lt;-</a:t>
+            </a:r>
+            <a:r>
+              <a:rPr>
+                <a:latin typeface="Courier"/>
+              </a:rPr>
+              <a:t> </a:t>
+            </a:r>
+            <a:r>
+              <a:rPr>
+                <a:solidFill>
+                  <a:srgbClr val="4070A0"/>
+                </a:solidFill>
+                <a:latin typeface="Courier"/>
+              </a:rPr>
+              <a:t>"hello world!"</a:t>
             </a:r>
           </a:p>
         </p:txBody>
@@ -4402,59 +4494,6 @@
               <a:t>name</a:t>
             </a:r>
           </a:p>
-          <a:p>
-            <a:pPr lvl="0" indent="0">
-              <a:buNone/>
-            </a:pPr>
-            <a:r>
-              <a:rPr>
-                <a:latin typeface="Courier"/>
-              </a:rPr>
-              <a:t>name </a:t>
-            </a:r>
-            <a:r>
-              <a:rPr>
-                <a:solidFill>
-                  <a:srgbClr val="007020"/>
-                </a:solidFill>
-                <a:latin typeface="Courier"/>
-              </a:rPr>
-              <a:t>&lt;-</a:t>
-            </a:r>
-            <a:r>
-              <a:rPr>
-                <a:latin typeface="Courier"/>
-              </a:rPr>
-              <a:t> </a:t>
-            </a:r>
-            <a:r>
-              <a:rPr>
-                <a:solidFill>
-                  <a:srgbClr val="4070A0"/>
-                </a:solidFill>
-                <a:latin typeface="Courier"/>
-              </a:rPr>
-              <a:t>"Ava Hoffman"</a:t>
-            </a:r>
-            <a:br/>
-            <a:r>
-              <a:rPr>
-                <a:latin typeface="Courier"/>
-              </a:rPr>
-              <a:t>name</a:t>
-            </a:r>
-          </a:p>
-          <a:p>
-            <a:pPr lvl="0" indent="0">
-              <a:buNone/>
-            </a:pPr>
-            <a:r>
-              <a:rPr>
-                <a:latin typeface="Courier"/>
-              </a:rPr>
-              <a:t>[1] "Ava Hoffman"</a:t>
-            </a:r>
-          </a:p>
         </p:txBody>
       </p:sp>
     </p:spTree>
@@ -4595,33 +4634,23 @@
             </a:pPr>
             <a:r>
               <a:rPr/>
-              <a:t>Combining</a:t>
-            </a:r>
-            <a:r>
-              <a:rPr/>
-              <a:t> </a:t>
-            </a:r>
-            <a:r>
-              <a:rPr/>
-              <a:t>objects</a:t>
-            </a:r>
-            <a:r>
-              <a:rPr/>
-              <a:t> </a:t>
-            </a:r>
-            <a:r>
-              <a:rPr/>
-              <a:t>with</a:t>
-            </a:r>
-            <a:r>
-              <a:rPr/>
-              <a:t> </a:t>
-            </a:r>
-            <a:r>
-              <a:rPr>
-                <a:latin typeface="Courier"/>
-              </a:rPr>
-              <a:t>c()</a:t>
+              <a:t>Simple</a:t>
+            </a:r>
+            <a:r>
+              <a:rPr/>
+              <a:t> </a:t>
+            </a:r>
+            <a:r>
+              <a:rPr/>
+              <a:t>object</a:t>
+            </a:r>
+            <a:r>
+              <a:rPr/>
+              <a:t> </a:t>
+            </a:r>
+            <a:r>
+              <a:rPr/>
+              <a:t>practice</a:t>
             </a:r>
           </a:p>
         </p:txBody>
@@ -4646,17 +4675,13 @@
             </a:pPr>
             <a:r>
               <a:rPr/>
-              <a:t>Use </a:t>
-            </a:r>
-            <a:r>
-              <a:rPr>
-                <a:latin typeface="Courier"/>
-              </a:rPr>
-              <a:t>c()</a:t>
-            </a:r>
-            <a:r>
-              <a:rPr/>
-              <a:t> to collect/combine single R objects into a vector of R objects. It is mostly used for creating vectors of numbers and character strings.</a:t>
+              <a:t>Try assigning your full name to an R object called </a:t>
+            </a:r>
+            <a:r>
+              <a:rPr>
+                <a:latin typeface="Courier"/>
+              </a:rPr>
+              <a:t>name</a:t>
             </a:r>
           </a:p>
           <a:p>
@@ -4667,7 +4692,7 @@
               <a:rPr>
                 <a:latin typeface="Courier"/>
               </a:rPr>
-              <a:t>x </a:t>
+              <a:t>name </a:t>
             </a:r>
             <a:r>
               <a:rPr>
@@ -4687,84 +4712,18 @@
             <a:r>
               <a:rPr>
                 <a:solidFill>
-                  <a:srgbClr val="06287E"/>
-                </a:solidFill>
-                <a:latin typeface="Courier"/>
-              </a:rPr>
-              <a:t>c</a:t>
-            </a:r>
-            <a:r>
-              <a:rPr>
-                <a:latin typeface="Courier"/>
-              </a:rPr>
-              <a:t>(</a:t>
-            </a:r>
-            <a:r>
-              <a:rPr>
-                <a:solidFill>
-                  <a:srgbClr val="40A070"/>
-                </a:solidFill>
-                <a:latin typeface="Courier"/>
-              </a:rPr>
-              <a:t>1</a:t>
-            </a:r>
-            <a:r>
-              <a:rPr>
-                <a:latin typeface="Courier"/>
-              </a:rPr>
-              <a:t>, </a:t>
-            </a:r>
-            <a:r>
-              <a:rPr>
-                <a:solidFill>
-                  <a:srgbClr val="40A070"/>
-                </a:solidFill>
-                <a:latin typeface="Courier"/>
-              </a:rPr>
-              <a:t>4</a:t>
-            </a:r>
-            <a:r>
-              <a:rPr>
-                <a:latin typeface="Courier"/>
-              </a:rPr>
-              <a:t>, </a:t>
-            </a:r>
-            <a:r>
-              <a:rPr>
-                <a:solidFill>
-                  <a:srgbClr val="40A070"/>
-                </a:solidFill>
-                <a:latin typeface="Courier"/>
-              </a:rPr>
-              <a:t>6</a:t>
-            </a:r>
-            <a:r>
-              <a:rPr>
-                <a:latin typeface="Courier"/>
-              </a:rPr>
-              <a:t>, </a:t>
-            </a:r>
-            <a:r>
-              <a:rPr>
-                <a:solidFill>
-                  <a:srgbClr val="40A070"/>
-                </a:solidFill>
-                <a:latin typeface="Courier"/>
-              </a:rPr>
-              <a:t>8</a:t>
-            </a:r>
-            <a:r>
-              <a:rPr>
-                <a:latin typeface="Courier"/>
-              </a:rPr>
-              <a:t>)</a:t>
+                  <a:srgbClr val="4070A0"/>
+                </a:solidFill>
+                <a:latin typeface="Courier"/>
+              </a:rPr>
+              <a:t>"Ava Hoffman"</a:t>
             </a:r>
             <a:br/>
             <a:r>
               <a:rPr>
                 <a:latin typeface="Courier"/>
               </a:rPr>
-              <a:t>x</a:t>
+              <a:t>name</a:t>
             </a:r>
           </a:p>
           <a:p>
@@ -4775,7 +4734,7 @@
               <a:rPr>
                 <a:latin typeface="Courier"/>
               </a:rPr>
-              <a:t>[1] 1 4 6 8</a:t>
+              <a:t>[1] "Ava Hoffman"</a:t>
             </a:r>
           </a:p>
         </p:txBody>
@@ -4873,13 +4832,136 @@
             </a:pPr>
             <a:r>
               <a:rPr/>
-              <a:t>Try assigning your first and last name as 2 separate character strings into a vector called </a:t>
-            </a:r>
-            <a:r>
-              <a:rPr>
-                <a:latin typeface="Courier"/>
-              </a:rPr>
-              <a:t>name2</a:t>
+              <a:t>Use </a:t>
+            </a:r>
+            <a:r>
+              <a:rPr>
+                <a:latin typeface="Courier"/>
+              </a:rPr>
+              <a:t>c()</a:t>
+            </a:r>
+            <a:r>
+              <a:rPr/>
+              <a:t> to collect/combine single R objects into a vector of R objects. It is mostly used for creating vectors of numbers and character strings.</a:t>
+            </a:r>
+          </a:p>
+          <a:p>
+            <a:pPr lvl="0" indent="0">
+              <a:buNone/>
+            </a:pPr>
+            <a:r>
+              <a:rPr>
+                <a:latin typeface="Courier"/>
+              </a:rPr>
+              <a:t>x </a:t>
+            </a:r>
+            <a:r>
+              <a:rPr>
+                <a:solidFill>
+                  <a:srgbClr val="007020"/>
+                </a:solidFill>
+                <a:latin typeface="Courier"/>
+              </a:rPr>
+              <a:t>&lt;-</a:t>
+            </a:r>
+            <a:r>
+              <a:rPr>
+                <a:latin typeface="Courier"/>
+              </a:rPr>
+              <a:t> </a:t>
+            </a:r>
+            <a:r>
+              <a:rPr>
+                <a:solidFill>
+                  <a:srgbClr val="06287E"/>
+                </a:solidFill>
+                <a:latin typeface="Courier"/>
+              </a:rPr>
+              <a:t>c</a:t>
+            </a:r>
+            <a:r>
+              <a:rPr>
+                <a:latin typeface="Courier"/>
+              </a:rPr>
+              <a:t>(</a:t>
+            </a:r>
+            <a:r>
+              <a:rPr>
+                <a:solidFill>
+                  <a:srgbClr val="40A070"/>
+                </a:solidFill>
+                <a:latin typeface="Courier"/>
+              </a:rPr>
+              <a:t>1</a:t>
+            </a:r>
+            <a:r>
+              <a:rPr>
+                <a:latin typeface="Courier"/>
+              </a:rPr>
+              <a:t>, </a:t>
+            </a:r>
+            <a:r>
+              <a:rPr>
+                <a:solidFill>
+                  <a:srgbClr val="40A070"/>
+                </a:solidFill>
+                <a:latin typeface="Courier"/>
+              </a:rPr>
+              <a:t>4</a:t>
+            </a:r>
+            <a:r>
+              <a:rPr>
+                <a:latin typeface="Courier"/>
+              </a:rPr>
+              <a:t>, </a:t>
+            </a:r>
+            <a:r>
+              <a:rPr>
+                <a:solidFill>
+                  <a:srgbClr val="40A070"/>
+                </a:solidFill>
+                <a:latin typeface="Courier"/>
+              </a:rPr>
+              <a:t>6</a:t>
+            </a:r>
+            <a:r>
+              <a:rPr>
+                <a:latin typeface="Courier"/>
+              </a:rPr>
+              <a:t>, </a:t>
+            </a:r>
+            <a:r>
+              <a:rPr>
+                <a:solidFill>
+                  <a:srgbClr val="40A070"/>
+                </a:solidFill>
+                <a:latin typeface="Courier"/>
+              </a:rPr>
+              <a:t>8</a:t>
+            </a:r>
+            <a:r>
+              <a:rPr>
+                <a:latin typeface="Courier"/>
+              </a:rPr>
+              <a:t>)</a:t>
+            </a:r>
+            <a:br/>
+            <a:r>
+              <a:rPr>
+                <a:latin typeface="Courier"/>
+              </a:rPr>
+              <a:t>x</a:t>
+            </a:r>
+          </a:p>
+          <a:p>
+            <a:pPr lvl="0" indent="0">
+              <a:buNone/>
+            </a:pPr>
+            <a:r>
+              <a:rPr>
+                <a:latin typeface="Courier"/>
+              </a:rPr>
+              <a:t>[1] 1 4 6 8</a:t>
             </a:r>
           </a:p>
         </p:txBody>
@@ -4986,95 +5068,6 @@
               <a:t>name2</a:t>
             </a:r>
           </a:p>
-          <a:p>
-            <a:pPr lvl="0" indent="0">
-              <a:buNone/>
-            </a:pPr>
-            <a:r>
-              <a:rPr>
-                <a:latin typeface="Courier"/>
-              </a:rPr>
-              <a:t>name2 </a:t>
-            </a:r>
-            <a:r>
-              <a:rPr>
-                <a:solidFill>
-                  <a:srgbClr val="007020"/>
-                </a:solidFill>
-                <a:latin typeface="Courier"/>
-              </a:rPr>
-              <a:t>&lt;-</a:t>
-            </a:r>
-            <a:r>
-              <a:rPr>
-                <a:latin typeface="Courier"/>
-              </a:rPr>
-              <a:t> </a:t>
-            </a:r>
-            <a:r>
-              <a:rPr>
-                <a:solidFill>
-                  <a:srgbClr val="06287E"/>
-                </a:solidFill>
-                <a:latin typeface="Courier"/>
-              </a:rPr>
-              <a:t>c</a:t>
-            </a:r>
-            <a:r>
-              <a:rPr>
-                <a:latin typeface="Courier"/>
-              </a:rPr>
-              <a:t>(</a:t>
-            </a:r>
-            <a:r>
-              <a:rPr>
-                <a:solidFill>
-                  <a:srgbClr val="4070A0"/>
-                </a:solidFill>
-                <a:latin typeface="Courier"/>
-              </a:rPr>
-              <a:t>"Ava"</a:t>
-            </a:r>
-            <a:r>
-              <a:rPr>
-                <a:latin typeface="Courier"/>
-              </a:rPr>
-              <a:t>, </a:t>
-            </a:r>
-            <a:r>
-              <a:rPr>
-                <a:solidFill>
-                  <a:srgbClr val="4070A0"/>
-                </a:solidFill>
-                <a:latin typeface="Courier"/>
-              </a:rPr>
-              <a:t>"Hoffman"</a:t>
-            </a:r>
-            <a:r>
-              <a:rPr>
-                <a:latin typeface="Courier"/>
-              </a:rPr>
-              <a:t>)</a:t>
-            </a:r>
-            <a:br/>
-            <a:r>
-              <a:rPr>
-                <a:latin typeface="Courier"/>
-              </a:rPr>
-              <a:t>name2</a:t>
-            </a:r>
-          </a:p>
-          <a:p>
-            <a:pPr lvl="0" indent="0">
-              <a:buNone/>
-            </a:pPr>
-            <a:r>
-              <a:rPr>
-                <a:latin typeface="Courier"/>
-              </a:rPr>
-              <a:t>[1] "Ava"     "Hoffman"</a:t>
-            </a:r>
-          </a:p>
         </p:txBody>
       </p:sp>
     </p:spTree>
@@ -5119,31 +5112,33 @@
             </a:pPr>
             <a:r>
               <a:rPr/>
-              <a:t>Basic</a:t>
-            </a:r>
-            <a:r>
-              <a:rPr/>
-              <a:t> </a:t>
-            </a:r>
-            <a:r>
-              <a:rPr/>
-              <a:t>terms:</a:t>
-            </a:r>
-            <a:r>
-              <a:rPr/>
-              <a:t> </a:t>
-            </a:r>
-            <a:r>
-              <a:rPr/>
-              <a:t>“</a:t>
-            </a:r>
-            <a:r>
-              <a:rPr/>
-              <a:t>function</a:t>
-            </a:r>
-            <a:r>
-              <a:rPr/>
-              <a:t>”</a:t>
+              <a:t>Combining</a:t>
+            </a:r>
+            <a:r>
+              <a:rPr/>
+              <a:t> </a:t>
+            </a:r>
+            <a:r>
+              <a:rPr/>
+              <a:t>objects</a:t>
+            </a:r>
+            <a:r>
+              <a:rPr/>
+              <a:t> </a:t>
+            </a:r>
+            <a:r>
+              <a:rPr/>
+              <a:t>with</a:t>
+            </a:r>
+            <a:r>
+              <a:rPr/>
+              <a:t> </a:t>
+            </a:r>
+            <a:r>
+              <a:rPr>
+                <a:latin typeface="Courier"/>
+              </a:rPr>
+              <a:t>c()</a:t>
             </a:r>
           </a:p>
         </p:txBody>
@@ -5167,38 +5162,103 @@
               <a:buNone/>
             </a:pPr>
             <a:r>
-              <a:rPr b="1"/>
-              <a:t>Function</a:t>
-            </a:r>
-            <a:r>
-              <a:rPr/>
-              <a:t> - a function is a piece of code that allows you to do something in R. You can write your own, use functions that come directly from installing R, or use functions from additional packages.</a:t>
-            </a:r>
-          </a:p>
-          <a:p>
-            <a:pPr lvl="0" marL="0" indent="0">
-              <a:buNone/>
-            </a:pPr>
-            <a:r>
-              <a:rPr/>
-              <a:t>You can think of a function as </a:t>
-            </a:r>
-            <a:r>
-              <a:rPr b="1"/>
-              <a:t>verb</a:t>
-            </a:r>
-            <a:r>
-              <a:rPr/>
-              <a:t> in R.</a:t>
-            </a:r>
-          </a:p>
-          <a:p>
-            <a:pPr lvl="0" marL="0" indent="0">
-              <a:buNone/>
-            </a:pPr>
-            <a:r>
-              <a:rPr/>
-              <a:t>A function might help you add numbers together, create a plot, or organize your data.</a:t>
+              <a:rPr/>
+              <a:t>Try assigning your first and last name as 2 separate character strings into a vector called </a:t>
+            </a:r>
+            <a:r>
+              <a:rPr>
+                <a:latin typeface="Courier"/>
+              </a:rPr>
+              <a:t>name2</a:t>
+            </a:r>
+          </a:p>
+          <a:p>
+            <a:pPr lvl="0" indent="0">
+              <a:buNone/>
+            </a:pPr>
+            <a:r>
+              <a:rPr>
+                <a:latin typeface="Courier"/>
+              </a:rPr>
+              <a:t>name2 </a:t>
+            </a:r>
+            <a:r>
+              <a:rPr>
+                <a:solidFill>
+                  <a:srgbClr val="007020"/>
+                </a:solidFill>
+                <a:latin typeface="Courier"/>
+              </a:rPr>
+              <a:t>&lt;-</a:t>
+            </a:r>
+            <a:r>
+              <a:rPr>
+                <a:latin typeface="Courier"/>
+              </a:rPr>
+              <a:t> </a:t>
+            </a:r>
+            <a:r>
+              <a:rPr>
+                <a:solidFill>
+                  <a:srgbClr val="06287E"/>
+                </a:solidFill>
+                <a:latin typeface="Courier"/>
+              </a:rPr>
+              <a:t>c</a:t>
+            </a:r>
+            <a:r>
+              <a:rPr>
+                <a:latin typeface="Courier"/>
+              </a:rPr>
+              <a:t>(</a:t>
+            </a:r>
+            <a:r>
+              <a:rPr>
+                <a:solidFill>
+                  <a:srgbClr val="4070A0"/>
+                </a:solidFill>
+                <a:latin typeface="Courier"/>
+              </a:rPr>
+              <a:t>"Ava"</a:t>
+            </a:r>
+            <a:r>
+              <a:rPr>
+                <a:latin typeface="Courier"/>
+              </a:rPr>
+              <a:t>, </a:t>
+            </a:r>
+            <a:r>
+              <a:rPr>
+                <a:solidFill>
+                  <a:srgbClr val="4070A0"/>
+                </a:solidFill>
+                <a:latin typeface="Courier"/>
+              </a:rPr>
+              <a:t>"Hoffman"</a:t>
+            </a:r>
+            <a:r>
+              <a:rPr>
+                <a:latin typeface="Courier"/>
+              </a:rPr>
+              <a:t>)</a:t>
+            </a:r>
+            <a:br/>
+            <a:r>
+              <a:rPr>
+                <a:latin typeface="Courier"/>
+              </a:rPr>
+              <a:t>name2</a:t>
+            </a:r>
+          </a:p>
+          <a:p>
+            <a:pPr lvl="0" indent="0">
+              <a:buNone/>
+            </a:pPr>
+            <a:r>
+              <a:rPr>
+                <a:latin typeface="Courier"/>
+              </a:rPr>
+              <a:t>[1] "Ava"     "Hoffman"</a:t>
             </a:r>
           </a:p>
         </p:txBody>
@@ -5245,39 +5305,31 @@
             </a:pPr>
             <a:r>
               <a:rPr/>
-              <a:t>Using</a:t>
-            </a:r>
-            <a:r>
-              <a:rPr/>
-              <a:t> </a:t>
-            </a:r>
-            <a:r>
-              <a:rPr/>
-              <a:t>functions</a:t>
-            </a:r>
-            <a:r>
-              <a:rPr/>
-              <a:t> </a:t>
-            </a:r>
-            <a:r>
-              <a:rPr/>
-              <a:t>on</a:t>
-            </a:r>
-            <a:r>
-              <a:rPr/>
-              <a:t> </a:t>
-            </a:r>
-            <a:r>
-              <a:rPr/>
-              <a:t>our</a:t>
-            </a:r>
-            <a:r>
-              <a:rPr/>
-              <a:t> </a:t>
-            </a:r>
-            <a:r>
-              <a:rPr/>
-              <a:t>vector</a:t>
+              <a:t>Basic</a:t>
+            </a:r>
+            <a:r>
+              <a:rPr/>
+              <a:t> </a:t>
+            </a:r>
+            <a:r>
+              <a:rPr/>
+              <a:t>terms:</a:t>
+            </a:r>
+            <a:r>
+              <a:rPr/>
+              <a:t> </a:t>
+            </a:r>
+            <a:r>
+              <a:rPr/>
+              <a:t>“</a:t>
+            </a:r>
+            <a:r>
+              <a:rPr/>
+              <a:t>function</a:t>
+            </a:r>
+            <a:r>
+              <a:rPr/>
+              <a:t>”</a:t>
             </a:r>
           </a:p>
         </p:txBody>
@@ -5297,135 +5349,42 @@
           <a:bodyPr/>
           <a:lstStyle/>
           <a:p>
-            <a:pPr lvl="1"/>
-            <a:r>
-              <a:rPr>
-                <a:latin typeface="Courier"/>
-              </a:rPr>
-              <a:t>class()</a:t>
-            </a:r>
-            <a:r>
-              <a:rPr/>
-              <a:t> tells us what kind of values the object contains (numeric, character, etc)</a:t>
-            </a:r>
-          </a:p>
-          <a:p>
-            <a:pPr lvl="1"/>
-            <a:r>
-              <a:rPr>
-                <a:latin typeface="Courier"/>
-              </a:rPr>
-              <a:t>length()</a:t>
-            </a:r>
-            <a:r>
-              <a:rPr/>
-              <a:t> tells us how many elements.</a:t>
-            </a:r>
-          </a:p>
-          <a:p>
-            <a:pPr lvl="0" indent="0">
-              <a:buNone/>
-            </a:pPr>
-            <a:r>
-              <a:rPr>
-                <a:latin typeface="Courier"/>
-              </a:rPr>
-              <a:t>name</a:t>
-            </a:r>
-          </a:p>
-          <a:p>
-            <a:pPr lvl="0" indent="0">
-              <a:buNone/>
-            </a:pPr>
-            <a:r>
-              <a:rPr>
-                <a:latin typeface="Courier"/>
-              </a:rPr>
-              <a:t>[1] "Ava Hoffman"</a:t>
-            </a:r>
-          </a:p>
-          <a:p>
-            <a:pPr lvl="0" indent="0">
-              <a:buNone/>
-            </a:pPr>
-            <a:r>
-              <a:rPr>
-                <a:solidFill>
-                  <a:srgbClr val="06287E"/>
-                </a:solidFill>
-                <a:latin typeface="Courier"/>
-              </a:rPr>
-              <a:t>class</a:t>
-            </a:r>
-            <a:r>
-              <a:rPr>
-                <a:latin typeface="Courier"/>
-              </a:rPr>
-              <a:t>(name)</a:t>
-            </a:r>
-          </a:p>
-          <a:p>
-            <a:pPr lvl="0" indent="0">
-              <a:buNone/>
-            </a:pPr>
-            <a:r>
-              <a:rPr>
-                <a:latin typeface="Courier"/>
-              </a:rPr>
-              <a:t>[1] "character"</a:t>
-            </a:r>
-          </a:p>
-          <a:p>
-            <a:pPr lvl="0" indent="0">
-              <a:buNone/>
-            </a:pPr>
-            <a:r>
-              <a:rPr>
-                <a:latin typeface="Courier"/>
-              </a:rPr>
-              <a:t>x</a:t>
-            </a:r>
-          </a:p>
-          <a:p>
-            <a:pPr lvl="0" indent="0">
-              <a:buNone/>
-            </a:pPr>
-            <a:r>
-              <a:rPr>
-                <a:latin typeface="Courier"/>
-              </a:rPr>
-              <a:t>[1] 1 4 6 8</a:t>
-            </a:r>
-          </a:p>
-          <a:p>
-            <a:pPr lvl="0" indent="0">
-              <a:buNone/>
-            </a:pPr>
-            <a:r>
-              <a:rPr>
-                <a:solidFill>
-                  <a:srgbClr val="06287E"/>
-                </a:solidFill>
-                <a:latin typeface="Courier"/>
-              </a:rPr>
-              <a:t>length</a:t>
-            </a:r>
-            <a:r>
-              <a:rPr>
-                <a:latin typeface="Courier"/>
-              </a:rPr>
-              <a:t>(x)</a:t>
-            </a:r>
-          </a:p>
-          <a:p>
-            <a:pPr lvl="0" indent="0">
-              <a:buNone/>
-            </a:pPr>
-            <a:r>
-              <a:rPr>
-                <a:latin typeface="Courier"/>
-              </a:rPr>
-              <a:t>[1] 4</a:t>
+            <a:pPr lvl="0" marL="0" indent="0">
+              <a:buNone/>
+            </a:pPr>
+            <a:r>
+              <a:rPr b="1"/>
+              <a:t>Function</a:t>
+            </a:r>
+            <a:r>
+              <a:rPr/>
+              <a:t> - a function is a piece of code that allows you to do something in R. You can write your own, use functions that come directly from installing R, or use functions from additional packages.</a:t>
+            </a:r>
+          </a:p>
+          <a:p>
+            <a:pPr lvl="0" marL="0" indent="0">
+              <a:buNone/>
+            </a:pPr>
+            <a:r>
+              <a:rPr/>
+              <a:t>You can think of a function as </a:t>
+            </a:r>
+            <a:r>
+              <a:rPr b="1"/>
+              <a:t>verb</a:t>
+            </a:r>
+            <a:r>
+              <a:rPr/>
+              <a:t> in R.</a:t>
+            </a:r>
+          </a:p>
+          <a:p>
+            <a:pPr lvl="0" marL="0" indent="0">
+              <a:buNone/>
+            </a:pPr>
+            <a:r>
+              <a:rPr/>
+              <a:t>A function might help you add numbers together, create a plot, or organize your data.</a:t>
             </a:r>
           </a:p>
         </p:txBody>
@@ -5472,59 +5431,39 @@
             </a:pPr>
             <a:r>
               <a:rPr/>
-              <a:t>GUT</a:t>
-            </a:r>
-            <a:r>
-              <a:rPr/>
-              <a:t> </a:t>
-            </a:r>
-            <a:r>
-              <a:rPr/>
-              <a:t>CHECK:</a:t>
-            </a:r>
-            <a:r>
-              <a:rPr/>
-              <a:t> </a:t>
-            </a:r>
-            <a:r>
-              <a:rPr/>
-              <a:t>What</a:t>
-            </a:r>
-            <a:r>
-              <a:rPr/>
-              <a:t> </a:t>
-            </a:r>
-            <a:r>
-              <a:rPr/>
-              <a:t>is</a:t>
-            </a:r>
-            <a:r>
-              <a:rPr/>
-              <a:t> </a:t>
-            </a:r>
-            <a:r>
-              <a:rPr/>
-              <a:t>a</a:t>
-            </a:r>
-            <a:r>
-              <a:rPr/>
-              <a:t> </a:t>
-            </a:r>
-            <a:r>
-              <a:rPr/>
-              <a:t>“</a:t>
-            </a:r>
-            <a:r>
-              <a:rPr/>
-              <a:t>function</a:t>
-            </a:r>
-            <a:r>
-              <a:rPr/>
-              <a:t>”</a:t>
-            </a:r>
-            <a:r>
-              <a:rPr/>
-              <a:t>?</a:t>
+              <a:t>Using</a:t>
+            </a:r>
+            <a:r>
+              <a:rPr/>
+              <a:t> </a:t>
+            </a:r>
+            <a:r>
+              <a:rPr/>
+              <a:t>functions</a:t>
+            </a:r>
+            <a:r>
+              <a:rPr/>
+              <a:t> </a:t>
+            </a:r>
+            <a:r>
+              <a:rPr/>
+              <a:t>on</a:t>
+            </a:r>
+            <a:r>
+              <a:rPr/>
+              <a:t> </a:t>
+            </a:r>
+            <a:r>
+              <a:rPr/>
+              <a:t>our</a:t>
+            </a:r>
+            <a:r>
+              <a:rPr/>
+              <a:t> </a:t>
+            </a:r>
+            <a:r>
+              <a:rPr/>
+              <a:t>vector</a:t>
             </a:r>
           </a:p>
         </p:txBody>
@@ -5544,30 +5483,135 @@
           <a:bodyPr/>
           <a:lstStyle/>
           <a:p>
-            <a:pPr lvl="0" marL="0" indent="0">
-              <a:buNone/>
-            </a:pPr>
-            <a:r>
-              <a:rPr/>
-              <a:t>A. a number or text</a:t>
-            </a:r>
-          </a:p>
-          <a:p>
-            <a:pPr lvl="0" marL="0" indent="0">
-              <a:buNone/>
-            </a:pPr>
-            <a:r>
-              <a:rPr/>
-              <a:t>B. a button inside RStudio</a:t>
-            </a:r>
-          </a:p>
-          <a:p>
-            <a:pPr lvl="0" marL="0" indent="0">
-              <a:buNone/>
-            </a:pPr>
-            <a:r>
-              <a:rPr/>
-              <a:t>C. code that does something</a:t>
+            <a:pPr lvl="1"/>
+            <a:r>
+              <a:rPr>
+                <a:latin typeface="Courier"/>
+              </a:rPr>
+              <a:t>class()</a:t>
+            </a:r>
+            <a:r>
+              <a:rPr/>
+              <a:t> tells us what kind of values the object contains (numeric, character, etc)</a:t>
+            </a:r>
+          </a:p>
+          <a:p>
+            <a:pPr lvl="1"/>
+            <a:r>
+              <a:rPr>
+                <a:latin typeface="Courier"/>
+              </a:rPr>
+              <a:t>length()</a:t>
+            </a:r>
+            <a:r>
+              <a:rPr/>
+              <a:t> tells us how many elements.</a:t>
+            </a:r>
+          </a:p>
+          <a:p>
+            <a:pPr lvl="0" indent="0">
+              <a:buNone/>
+            </a:pPr>
+            <a:r>
+              <a:rPr>
+                <a:latin typeface="Courier"/>
+              </a:rPr>
+              <a:t>name</a:t>
+            </a:r>
+          </a:p>
+          <a:p>
+            <a:pPr lvl="0" indent="0">
+              <a:buNone/>
+            </a:pPr>
+            <a:r>
+              <a:rPr>
+                <a:latin typeface="Courier"/>
+              </a:rPr>
+              <a:t>[1] "Ava Hoffman"</a:t>
+            </a:r>
+          </a:p>
+          <a:p>
+            <a:pPr lvl="0" indent="0">
+              <a:buNone/>
+            </a:pPr>
+            <a:r>
+              <a:rPr>
+                <a:solidFill>
+                  <a:srgbClr val="06287E"/>
+                </a:solidFill>
+                <a:latin typeface="Courier"/>
+              </a:rPr>
+              <a:t>class</a:t>
+            </a:r>
+            <a:r>
+              <a:rPr>
+                <a:latin typeface="Courier"/>
+              </a:rPr>
+              <a:t>(name)</a:t>
+            </a:r>
+          </a:p>
+          <a:p>
+            <a:pPr lvl="0" indent="0">
+              <a:buNone/>
+            </a:pPr>
+            <a:r>
+              <a:rPr>
+                <a:latin typeface="Courier"/>
+              </a:rPr>
+              <a:t>[1] "character"</a:t>
+            </a:r>
+          </a:p>
+          <a:p>
+            <a:pPr lvl="0" indent="0">
+              <a:buNone/>
+            </a:pPr>
+            <a:r>
+              <a:rPr>
+                <a:latin typeface="Courier"/>
+              </a:rPr>
+              <a:t>x</a:t>
+            </a:r>
+          </a:p>
+          <a:p>
+            <a:pPr lvl="0" indent="0">
+              <a:buNone/>
+            </a:pPr>
+            <a:r>
+              <a:rPr>
+                <a:latin typeface="Courier"/>
+              </a:rPr>
+              <a:t>[1] 1 4 6 8</a:t>
+            </a:r>
+          </a:p>
+          <a:p>
+            <a:pPr lvl="0" indent="0">
+              <a:buNone/>
+            </a:pPr>
+            <a:r>
+              <a:rPr>
+                <a:solidFill>
+                  <a:srgbClr val="06287E"/>
+                </a:solidFill>
+                <a:latin typeface="Courier"/>
+              </a:rPr>
+              <a:t>length</a:t>
+            </a:r>
+            <a:r>
+              <a:rPr>
+                <a:latin typeface="Courier"/>
+              </a:rPr>
+              <a:t>(x)</a:t>
+            </a:r>
+          </a:p>
+          <a:p>
+            <a:pPr lvl="0" indent="0">
+              <a:buNone/>
+            </a:pPr>
+            <a:r>
+              <a:rPr>
+                <a:latin typeface="Courier"/>
+              </a:rPr>
+              <a:t>[1] 4</a:t>
             </a:r>
           </a:p>
         </p:txBody>
@@ -5614,15 +5658,59 @@
             </a:pPr>
             <a:r>
               <a:rPr/>
-              <a:t>Combining</a:t>
-            </a:r>
-            <a:r>
-              <a:rPr/>
-              <a:t> </a:t>
-            </a:r>
-            <a:r>
-              <a:rPr/>
-              <a:t>vectors</a:t>
+              <a:t>GUT</a:t>
+            </a:r>
+            <a:r>
+              <a:rPr/>
+              <a:t> </a:t>
+            </a:r>
+            <a:r>
+              <a:rPr/>
+              <a:t>CHECK:</a:t>
+            </a:r>
+            <a:r>
+              <a:rPr/>
+              <a:t> </a:t>
+            </a:r>
+            <a:r>
+              <a:rPr/>
+              <a:t>What</a:t>
+            </a:r>
+            <a:r>
+              <a:rPr/>
+              <a:t> </a:t>
+            </a:r>
+            <a:r>
+              <a:rPr/>
+              <a:t>is</a:t>
+            </a:r>
+            <a:r>
+              <a:rPr/>
+              <a:t> </a:t>
+            </a:r>
+            <a:r>
+              <a:rPr/>
+              <a:t>a</a:t>
+            </a:r>
+            <a:r>
+              <a:rPr/>
+              <a:t> </a:t>
+            </a:r>
+            <a:r>
+              <a:rPr/>
+              <a:t>“</a:t>
+            </a:r>
+            <a:r>
+              <a:rPr/>
+              <a:t>function</a:t>
+            </a:r>
+            <a:r>
+              <a:rPr/>
+              <a:t>”</a:t>
+            </a:r>
+            <a:r>
+              <a:rPr/>
+              <a:t>?</a:t>
             </a:r>
           </a:p>
         </p:txBody>
@@ -5647,97 +5735,25 @@
             </a:pPr>
             <a:r>
               <a:rPr/>
-              <a:t>It’s fine to combine vectors, but all values will end up with the same class!</a:t>
-            </a:r>
-          </a:p>
-          <a:p>
-            <a:pPr lvl="0" indent="0">
-              <a:buNone/>
-            </a:pPr>
-            <a:r>
-              <a:rPr>
-                <a:latin typeface="Courier"/>
-              </a:rPr>
-              <a:t>vect </a:t>
-            </a:r>
-            <a:r>
-              <a:rPr>
-                <a:solidFill>
-                  <a:srgbClr val="007020"/>
-                </a:solidFill>
-                <a:latin typeface="Courier"/>
-              </a:rPr>
-              <a:t>&lt;-</a:t>
-            </a:r>
-            <a:r>
-              <a:rPr>
-                <a:latin typeface="Courier"/>
-              </a:rPr>
-              <a:t> </a:t>
-            </a:r>
-            <a:r>
-              <a:rPr>
-                <a:solidFill>
-                  <a:srgbClr val="06287E"/>
-                </a:solidFill>
-                <a:latin typeface="Courier"/>
-              </a:rPr>
-              <a:t>c</a:t>
-            </a:r>
-            <a:r>
-              <a:rPr>
-                <a:latin typeface="Courier"/>
-              </a:rPr>
-              <a:t>(name, x)</a:t>
-            </a:r>
-            <a:br/>
-            <a:r>
-              <a:rPr>
-                <a:latin typeface="Courier"/>
-              </a:rPr>
-              <a:t>vect</a:t>
-            </a:r>
-          </a:p>
-          <a:p>
-            <a:pPr lvl="0" indent="0">
-              <a:buNone/>
-            </a:pPr>
-            <a:r>
-              <a:rPr>
-                <a:latin typeface="Courier"/>
-              </a:rPr>
-              <a:t>[1] "Ava Hoffman" "1"           "4"           "6"           "8"          </a:t>
-            </a:r>
-          </a:p>
-          <a:p>
-            <a:pPr lvl="0" indent="0">
-              <a:buNone/>
-            </a:pPr>
-            <a:r>
-              <a:rPr>
-                <a:solidFill>
-                  <a:srgbClr val="06287E"/>
-                </a:solidFill>
-                <a:latin typeface="Courier"/>
-              </a:rPr>
-              <a:t>class</a:t>
-            </a:r>
-            <a:r>
-              <a:rPr>
-                <a:latin typeface="Courier"/>
-              </a:rPr>
-              <a:t>(vect)</a:t>
-            </a:r>
-          </a:p>
-          <a:p>
-            <a:pPr lvl="0" indent="0">
-              <a:buNone/>
-            </a:pPr>
-            <a:r>
-              <a:rPr>
-                <a:latin typeface="Courier"/>
-              </a:rPr>
-              <a:t>[1] "character"</a:t>
+              <a:t>A. a number or text</a:t>
+            </a:r>
+          </a:p>
+          <a:p>
+            <a:pPr lvl="0" marL="0" indent="0">
+              <a:buNone/>
+            </a:pPr>
+            <a:r>
+              <a:rPr/>
+              <a:t>B. a button inside RStudio</a:t>
+            </a:r>
+          </a:p>
+          <a:p>
+            <a:pPr lvl="0" marL="0" indent="0">
+              <a:buNone/>
+            </a:pPr>
+            <a:r>
+              <a:rPr/>
+              <a:t>C. code that does something</a:t>
             </a:r>
           </a:p>
         </p:txBody>
@@ -5784,15 +5800,15 @@
             </a:pPr>
             <a:r>
               <a:rPr/>
-              <a:t>Practicing</a:t>
-            </a:r>
-            <a:r>
-              <a:rPr/>
-              <a:t> </a:t>
-            </a:r>
-            <a:r>
-              <a:rPr/>
-              <a:t>functions</a:t>
+              <a:t>Combining</a:t>
+            </a:r>
+            <a:r>
+              <a:rPr/>
+              <a:t> </a:t>
+            </a:r>
+            <a:r>
+              <a:rPr/>
+              <a:t>vectors</a:t>
             </a:r>
           </a:p>
         </p:txBody>
@@ -5817,26 +5833,97 @@
             </a:pPr>
             <a:r>
               <a:rPr/>
-              <a:t>What do you expect for the length of the </a:t>
-            </a:r>
-            <a:r>
-              <a:rPr>
-                <a:latin typeface="Courier"/>
-              </a:rPr>
-              <a:t>name2</a:t>
-            </a:r>
-            <a:r>
-              <a:rPr/>
-              <a:t> object?</a:t>
-            </a:r>
-          </a:p>
-          <a:p>
-            <a:pPr lvl="0" marL="0" indent="0">
-              <a:buNone/>
-            </a:pPr>
-            <a:r>
-              <a:rPr/>
-              <a:t>What is the class?</a:t>
+              <a:t>It’s fine to combine vectors, but all values will end up with the same class!</a:t>
+            </a:r>
+          </a:p>
+          <a:p>
+            <a:pPr lvl="0" indent="0">
+              <a:buNone/>
+            </a:pPr>
+            <a:r>
+              <a:rPr>
+                <a:latin typeface="Courier"/>
+              </a:rPr>
+              <a:t>vect </a:t>
+            </a:r>
+            <a:r>
+              <a:rPr>
+                <a:solidFill>
+                  <a:srgbClr val="007020"/>
+                </a:solidFill>
+                <a:latin typeface="Courier"/>
+              </a:rPr>
+              <a:t>&lt;-</a:t>
+            </a:r>
+            <a:r>
+              <a:rPr>
+                <a:latin typeface="Courier"/>
+              </a:rPr>
+              <a:t> </a:t>
+            </a:r>
+            <a:r>
+              <a:rPr>
+                <a:solidFill>
+                  <a:srgbClr val="06287E"/>
+                </a:solidFill>
+                <a:latin typeface="Courier"/>
+              </a:rPr>
+              <a:t>c</a:t>
+            </a:r>
+            <a:r>
+              <a:rPr>
+                <a:latin typeface="Courier"/>
+              </a:rPr>
+              <a:t>(name, x)</a:t>
+            </a:r>
+            <a:br/>
+            <a:r>
+              <a:rPr>
+                <a:latin typeface="Courier"/>
+              </a:rPr>
+              <a:t>vect</a:t>
+            </a:r>
+          </a:p>
+          <a:p>
+            <a:pPr lvl="0" indent="0">
+              <a:buNone/>
+            </a:pPr>
+            <a:r>
+              <a:rPr>
+                <a:latin typeface="Courier"/>
+              </a:rPr>
+              <a:t>[1] "Ava Hoffman" "1"           "4"           "6"           "8"          </a:t>
+            </a:r>
+          </a:p>
+          <a:p>
+            <a:pPr lvl="0" indent="0">
+              <a:buNone/>
+            </a:pPr>
+            <a:r>
+              <a:rPr>
+                <a:solidFill>
+                  <a:srgbClr val="06287E"/>
+                </a:solidFill>
+                <a:latin typeface="Courier"/>
+              </a:rPr>
+              <a:t>class</a:t>
+            </a:r>
+            <a:r>
+              <a:rPr>
+                <a:latin typeface="Courier"/>
+              </a:rPr>
+              <a:t>(vect)</a:t>
+            </a:r>
+          </a:p>
+          <a:p>
+            <a:pPr lvl="0" indent="0">
+              <a:buNone/>
+            </a:pPr>
+            <a:r>
+              <a:rPr>
+                <a:latin typeface="Courier"/>
+              </a:rPr>
+              <a:t>[1] "character"</a:t>
             </a:r>
           </a:p>
         </p:txBody>
@@ -5938,68 +6025,6 @@
               <a:t>What is the class?</a:t>
             </a:r>
           </a:p>
-          <a:p>
-            <a:pPr lvl="0" indent="0">
-              <a:buNone/>
-            </a:pPr>
-            <a:r>
-              <a:rPr>
-                <a:solidFill>
-                  <a:srgbClr val="06287E"/>
-                </a:solidFill>
-                <a:latin typeface="Courier"/>
-              </a:rPr>
-              <a:t>length</a:t>
-            </a:r>
-            <a:r>
-              <a:rPr>
-                <a:latin typeface="Courier"/>
-              </a:rPr>
-              <a:t>(name2)</a:t>
-            </a:r>
-          </a:p>
-          <a:p>
-            <a:pPr lvl="0" indent="0">
-              <a:buNone/>
-            </a:pPr>
-            <a:r>
-              <a:rPr>
-                <a:latin typeface="Courier"/>
-              </a:rPr>
-              <a:t>[1] 2</a:t>
-            </a:r>
-          </a:p>
-          <a:p>
-            <a:pPr lvl="0" indent="0">
-              <a:buNone/>
-            </a:pPr>
-            <a:r>
-              <a:rPr>
-                <a:solidFill>
-                  <a:srgbClr val="06287E"/>
-                </a:solidFill>
-                <a:latin typeface="Courier"/>
-              </a:rPr>
-              <a:t>class</a:t>
-            </a:r>
-            <a:r>
-              <a:rPr>
-                <a:latin typeface="Courier"/>
-              </a:rPr>
-              <a:t>(name2)</a:t>
-            </a:r>
-          </a:p>
-          <a:p>
-            <a:pPr lvl="0" indent="0">
-              <a:buNone/>
-            </a:pPr>
-            <a:r>
-              <a:rPr>
-                <a:latin typeface="Courier"/>
-              </a:rPr>
-              <a:t>[1] "character"</a:t>
-            </a:r>
-          </a:p>
         </p:txBody>
       </p:sp>
     </p:spTree>
@@ -6044,23 +6069,15 @@
             </a:pPr>
             <a:r>
               <a:rPr/>
-              <a:t>Commenting</a:t>
-            </a:r>
-            <a:r>
-              <a:rPr/>
-              <a:t> </a:t>
-            </a:r>
-            <a:r>
-              <a:rPr/>
-              <a:t>in</a:t>
-            </a:r>
-            <a:r>
-              <a:rPr/>
-              <a:t> </a:t>
-            </a:r>
-            <a:r>
-              <a:rPr/>
-              <a:t>code</a:t>
+              <a:t>Practicing</a:t>
+            </a:r>
+            <a:r>
+              <a:rPr/>
+              <a:t> </a:t>
+            </a:r>
+            <a:r>
+              <a:rPr/>
+              <a:t>functions</a:t>
             </a:r>
           </a:p>
         </p:txBody>
@@ -6084,14 +6101,27 @@
               <a:buNone/>
             </a:pPr>
             <a:r>
-              <a:rPr>
-                <a:latin typeface="Courier"/>
-              </a:rPr>
-              <a:t>#</a:t>
-            </a:r>
-            <a:r>
-              <a:rPr/>
-              <a:t> creates a comment in R code</a:t>
+              <a:rPr/>
+              <a:t>What do you expect for the length of the </a:t>
+            </a:r>
+            <a:r>
+              <a:rPr>
+                <a:latin typeface="Courier"/>
+              </a:rPr>
+              <a:t>name2</a:t>
+            </a:r>
+            <a:r>
+              <a:rPr/>
+              <a:t> object?</a:t>
+            </a:r>
+          </a:p>
+          <a:p>
+            <a:pPr lvl="0" marL="0" indent="0">
+              <a:buNone/>
+            </a:pPr>
+            <a:r>
+              <a:rPr/>
+              <a:t>What is the class?</a:t>
             </a:r>
           </a:p>
           <a:p>
@@ -6099,69 +6129,19 @@
               <a:buNone/>
             </a:pPr>
             <a:r>
-              <a:rPr i="1">
-                <a:solidFill>
-                  <a:srgbClr val="60A0B0"/>
-                </a:solidFill>
-                <a:latin typeface="Courier"/>
-              </a:rPr>
-              <a:t># 1 + 2 &lt;- this does not get run</a:t>
-            </a:r>
-            <a:br/>
-            <a:br/>
-            <a:r>
-              <a:rPr>
-                <a:solidFill>
-                  <a:srgbClr val="40A070"/>
-                </a:solidFill>
-                <a:latin typeface="Courier"/>
-              </a:rPr>
-              <a:t>1</a:t>
-            </a:r>
-            <a:r>
-              <a:rPr>
-                <a:latin typeface="Courier"/>
-              </a:rPr>
-              <a:t> </a:t>
-            </a:r>
-            <a:r>
-              <a:rPr>
-                <a:solidFill>
-                  <a:srgbClr val="4070A0"/>
-                </a:solidFill>
-                <a:latin typeface="Courier"/>
-              </a:rPr>
-              <a:t>+</a:t>
-            </a:r>
-            <a:r>
-              <a:rPr>
-                <a:latin typeface="Courier"/>
-              </a:rPr>
-              <a:t> </a:t>
-            </a:r>
-            <a:r>
-              <a:rPr>
-                <a:solidFill>
-                  <a:srgbClr val="40A070"/>
-                </a:solidFill>
-                <a:latin typeface="Courier"/>
-              </a:rPr>
-              <a:t>2</a:t>
-            </a:r>
-            <a:r>
-              <a:rPr>
-                <a:latin typeface="Courier"/>
-              </a:rPr>
-              <a:t> </a:t>
-            </a:r>
-            <a:r>
-              <a:rPr i="1">
-                <a:solidFill>
-                  <a:srgbClr val="60A0B0"/>
-                </a:solidFill>
-                <a:latin typeface="Courier"/>
-              </a:rPr>
-              <a:t># &lt;- this does</a:t>
+              <a:rPr>
+                <a:solidFill>
+                  <a:srgbClr val="06287E"/>
+                </a:solidFill>
+                <a:latin typeface="Courier"/>
+              </a:rPr>
+              <a:t>length</a:t>
+            </a:r>
+            <a:r>
+              <a:rPr>
+                <a:latin typeface="Courier"/>
+              </a:rPr>
+              <a:t>(name2)</a:t>
             </a:r>
           </a:p>
           <a:p>
@@ -6172,7 +6152,38 @@
               <a:rPr>
                 <a:latin typeface="Courier"/>
               </a:rPr>
-              <a:t>[1] 3</a:t>
+              <a:t>[1] 2</a:t>
+            </a:r>
+          </a:p>
+          <a:p>
+            <a:pPr lvl="0" indent="0">
+              <a:buNone/>
+            </a:pPr>
+            <a:r>
+              <a:rPr>
+                <a:solidFill>
+                  <a:srgbClr val="06287E"/>
+                </a:solidFill>
+                <a:latin typeface="Courier"/>
+              </a:rPr>
+              <a:t>class</a:t>
+            </a:r>
+            <a:r>
+              <a:rPr>
+                <a:latin typeface="Courier"/>
+              </a:rPr>
+              <a:t>(name2)</a:t>
+            </a:r>
+          </a:p>
+          <a:p>
+            <a:pPr lvl="0" indent="0">
+              <a:buNone/>
+            </a:pPr>
+            <a:r>
+              <a:rPr>
+                <a:latin typeface="Courier"/>
+              </a:rPr>
+              <a:t>[1] "character"</a:t>
             </a:r>
           </a:p>
         </p:txBody>
@@ -6271,140 +6282,135 @@
             </a:pPr>
             <a:r>
               <a:rPr/>
-              <a:t>Lab</a:t>
-            </a:r>
-            <a:r>
-              <a:rPr/>
-              <a:t> </a:t>
-            </a:r>
-            <a:r>
-              <a:rPr/>
-              <a:t>Part</a:t>
-            </a:r>
-            <a:r>
-              <a:rPr/>
-              <a:t> </a:t>
-            </a:r>
-            <a:r>
-              <a:rPr/>
+              <a:t>Commenting</a:t>
+            </a:r>
+            <a:r>
+              <a:rPr/>
+              <a:t> </a:t>
+            </a:r>
+            <a:r>
+              <a:rPr/>
+              <a:t>in</a:t>
+            </a:r>
+            <a:r>
+              <a:rPr/>
+              <a:t> </a:t>
+            </a:r>
+            <a:r>
+              <a:rPr/>
+              <a:t>code</a:t>
+            </a:r>
+          </a:p>
+        </p:txBody>
+      </p:sp>
+      <p:sp>
+        <p:nvSpPr>
+          <p:cNvPr id="3" name="Content Placeholder 2"/>
+          <p:cNvSpPr>
+            <a:spLocks noGrp="1"/>
+          </p:cNvSpPr>
+          <p:nvPr>
+            <p:ph idx="1"/>
+          </p:nvPr>
+        </p:nvSpPr>
+        <p:spPr/>
+        <p:txBody>
+          <a:bodyPr/>
+          <a:lstStyle/>
+          <a:p>
+            <a:pPr lvl="0" marL="0" indent="0">
+              <a:buNone/>
+            </a:pPr>
+            <a:r>
+              <a:rPr>
+                <a:latin typeface="Courier"/>
+              </a:rPr>
+              <a:t>#</a:t>
+            </a:r>
+            <a:r>
+              <a:rPr/>
+              <a:t> creates a comment in R code</a:t>
+            </a:r>
+          </a:p>
+          <a:p>
+            <a:pPr lvl="0" indent="0">
+              <a:buNone/>
+            </a:pPr>
+            <a:r>
+              <a:rPr i="1">
+                <a:solidFill>
+                  <a:srgbClr val="60A0B0"/>
+                </a:solidFill>
+                <a:latin typeface="Courier"/>
+              </a:rPr>
+              <a:t># 1 + 2 &lt;- this does not get run</a:t>
+            </a:r>
+            <a:br/>
+            <a:br/>
+            <a:r>
+              <a:rPr>
+                <a:solidFill>
+                  <a:srgbClr val="40A070"/>
+                </a:solidFill>
+                <a:latin typeface="Courier"/>
+              </a:rPr>
               <a:t>1</a:t>
             </a:r>
-          </a:p>
-        </p:txBody>
-      </p:sp>
-      <p:sp>
-        <p:nvSpPr>
-          <p:cNvPr id="3" name="Content Placeholder 2"/>
-          <p:cNvSpPr>
-            <a:spLocks noGrp="1"/>
-          </p:cNvSpPr>
-          <p:nvPr>
-            <p:ph idx="1"/>
-          </p:nvPr>
-        </p:nvSpPr>
-        <p:spPr/>
-        <p:txBody>
-          <a:bodyPr/>
-          <a:lstStyle/>
-          <a:p>
-            <a:pPr lvl="1"/>
-            <a:r>
-              <a:rPr/>
-              <a:t>Assign values to objects with </a:t>
-            </a:r>
-            <a:r>
-              <a:rPr>
-                <a:latin typeface="Courier"/>
-              </a:rPr>
-              <a:t>&lt;-</a:t>
-            </a:r>
-            <a:r>
-              <a:rPr/>
-              <a:t> (new name on left side)</a:t>
-            </a:r>
-          </a:p>
-          <a:p>
-            <a:pPr lvl="1"/>
-            <a:r>
-              <a:rPr/>
-              <a:t>Use the </a:t>
-            </a:r>
-            <a:r>
-              <a:rPr>
-                <a:latin typeface="Courier"/>
-              </a:rPr>
-              <a:t>c()</a:t>
-            </a:r>
-            <a:r>
-              <a:rPr/>
-              <a:t> function to combine text/numbers/etc. into a vector</a:t>
-            </a:r>
-          </a:p>
-          <a:p>
-            <a:pPr lvl="1"/>
-            <a:r>
-              <a:rPr>
-                <a:latin typeface="Courier"/>
-              </a:rPr>
-              <a:t>class()</a:t>
-            </a:r>
-            <a:r>
-              <a:rPr/>
-              <a:t> tells you the class (kind) of object</a:t>
-            </a:r>
-          </a:p>
-          <a:p>
-            <a:pPr lvl="1"/>
-            <a:r>
-              <a:rPr/>
-              <a:t>Use the </a:t>
-            </a:r>
-            <a:r>
-              <a:rPr>
-                <a:latin typeface="Courier"/>
-              </a:rPr>
-              <a:t>length()</a:t>
-            </a:r>
-            <a:r>
-              <a:rPr/>
-              <a:t> function to determine number of elements</a:t>
-            </a:r>
-          </a:p>
-          <a:p>
-            <a:pPr lvl="1"/>
-            <a:r>
-              <a:rPr>
-                <a:latin typeface="Courier"/>
-              </a:rPr>
-              <a:t>#</a:t>
-            </a:r>
-            <a:r>
-              <a:rPr/>
-              <a:t> for comments or to deactivate a line of code</a:t>
-            </a:r>
-          </a:p>
-          <a:p>
-            <a:pPr lvl="0" marL="0" indent="0">
-              <a:buNone/>
-            </a:pPr>
-            <a:r>
-              <a:rPr/>
-              <a:t>Just open up the file to see the questions for lab. More about the file type soon!</a:t>
-            </a:r>
-          </a:p>
-          <a:p>
-            <a:pPr lvl="0" marL="0" indent="0">
-              <a:buNone/>
-            </a:pPr>
-            <a:r>
-              <a:rPr/>
-              <a:t>💻 </a:t>
-            </a:r>
-            <a:r>
-              <a:rPr>
-                <a:hlinkClick r:id="rId2"/>
-              </a:rPr>
-              <a:t>Lab</a:t>
+            <a:r>
+              <a:rPr>
+                <a:latin typeface="Courier"/>
+              </a:rPr>
+              <a:t> </a:t>
+            </a:r>
+            <a:r>
+              <a:rPr>
+                <a:solidFill>
+                  <a:srgbClr val="4070A0"/>
+                </a:solidFill>
+                <a:latin typeface="Courier"/>
+              </a:rPr>
+              <a:t>+</a:t>
+            </a:r>
+            <a:r>
+              <a:rPr>
+                <a:latin typeface="Courier"/>
+              </a:rPr>
+              <a:t> </a:t>
+            </a:r>
+            <a:r>
+              <a:rPr>
+                <a:solidFill>
+                  <a:srgbClr val="40A070"/>
+                </a:solidFill>
+                <a:latin typeface="Courier"/>
+              </a:rPr>
+              <a:t>2</a:t>
+            </a:r>
+            <a:r>
+              <a:rPr>
+                <a:latin typeface="Courier"/>
+              </a:rPr>
+              <a:t> </a:t>
+            </a:r>
+            <a:r>
+              <a:rPr i="1">
+                <a:solidFill>
+                  <a:srgbClr val="60A0B0"/>
+                </a:solidFill>
+                <a:latin typeface="Courier"/>
+              </a:rPr>
+              <a:t># &lt;- this does</a:t>
+            </a:r>
+          </a:p>
+          <a:p>
+            <a:pPr lvl="0" indent="0">
+              <a:buNone/>
+            </a:pPr>
+            <a:r>
+              <a:rPr>
+                <a:latin typeface="Courier"/>
+              </a:rPr>
+              <a:t>[1] 3</a:t>
             </a:r>
           </a:p>
         </p:txBody>
@@ -6451,31 +6457,23 @@
             </a:pPr>
             <a:r>
               <a:rPr/>
-              <a:t>Math</a:t>
-            </a:r>
-            <a:r>
-              <a:rPr/>
-              <a:t> </a:t>
-            </a:r>
-            <a:r>
-              <a:rPr/>
-              <a:t>+</a:t>
-            </a:r>
-            <a:r>
-              <a:rPr/>
-              <a:t> </a:t>
-            </a:r>
-            <a:r>
-              <a:rPr/>
-              <a:t>vector</a:t>
-            </a:r>
-            <a:r>
-              <a:rPr/>
-              <a:t> </a:t>
-            </a:r>
-            <a:r>
-              <a:rPr/>
-              <a:t>objects</a:t>
+              <a:t>Lab</a:t>
+            </a:r>
+            <a:r>
+              <a:rPr/>
+              <a:t> </a:t>
+            </a:r>
+            <a:r>
+              <a:rPr/>
+              <a:t>Part</a:t>
+            </a:r>
+            <a:r>
+              <a:rPr/>
+              <a:t> </a:t>
+            </a:r>
+            <a:r>
+              <a:rPr/>
+              <a:t>1</a:t>
             </a:r>
           </a:p>
         </p:txBody>
@@ -6495,216 +6493,104 @@
           <a:bodyPr/>
           <a:lstStyle/>
           <a:p>
+            <a:pPr lvl="1"/>
+            <a:r>
+              <a:rPr/>
+              <a:t>Assign values to objects with </a:t>
+            </a:r>
+            <a:r>
+              <a:rPr>
+                <a:latin typeface="Courier"/>
+              </a:rPr>
+              <a:t>&lt;-</a:t>
+            </a:r>
+            <a:r>
+              <a:rPr/>
+              <a:t> (new name on left side)</a:t>
+            </a:r>
+          </a:p>
+          <a:p>
+            <a:pPr lvl="1"/>
+            <a:r>
+              <a:rPr/>
+              <a:t>Use the </a:t>
+            </a:r>
+            <a:r>
+              <a:rPr>
+                <a:latin typeface="Courier"/>
+              </a:rPr>
+              <a:t>c()</a:t>
+            </a:r>
+            <a:r>
+              <a:rPr/>
+              <a:t> function to combine text/numbers/etc. into a vector</a:t>
+            </a:r>
+          </a:p>
+          <a:p>
+            <a:pPr lvl="1"/>
+            <a:r>
+              <a:rPr>
+                <a:latin typeface="Courier"/>
+              </a:rPr>
+              <a:t>class()</a:t>
+            </a:r>
+            <a:r>
+              <a:rPr/>
+              <a:t> tells you the class (kind) of object</a:t>
+            </a:r>
+          </a:p>
+          <a:p>
+            <a:pPr lvl="1"/>
+            <a:r>
+              <a:rPr/>
+              <a:t>Use the </a:t>
+            </a:r>
+            <a:r>
+              <a:rPr>
+                <a:latin typeface="Courier"/>
+              </a:rPr>
+              <a:t>length()</a:t>
+            </a:r>
+            <a:r>
+              <a:rPr/>
+              <a:t> function to determine number of elements</a:t>
+            </a:r>
+          </a:p>
+          <a:p>
+            <a:pPr lvl="1"/>
+            <a:r>
+              <a:rPr>
+                <a:latin typeface="Courier"/>
+              </a:rPr>
+              <a:t>#</a:t>
+            </a:r>
+            <a:r>
+              <a:rPr/>
+              <a:t> for comments or to deactivate a line of code</a:t>
+            </a:r>
+          </a:p>
+          <a:p>
             <a:pPr lvl="0" marL="0" indent="0">
               <a:buNone/>
             </a:pPr>
             <a:r>
               <a:rPr/>
-              <a:t>You can perform math with vectors.</a:t>
-            </a:r>
-          </a:p>
-          <a:p>
-            <a:pPr lvl="0" indent="0">
-              <a:buNone/>
-            </a:pPr>
-            <a:r>
-              <a:rPr>
-                <a:latin typeface="Courier"/>
-              </a:rPr>
-              <a:t>x </a:t>
-            </a:r>
-            <a:r>
-              <a:rPr>
-                <a:solidFill>
-                  <a:srgbClr val="4070A0"/>
-                </a:solidFill>
-                <a:latin typeface="Courier"/>
-              </a:rPr>
-              <a:t>+</a:t>
-            </a:r>
-            <a:r>
-              <a:rPr>
-                <a:latin typeface="Courier"/>
-              </a:rPr>
-              <a:t> </a:t>
-            </a:r>
-            <a:r>
-              <a:rPr>
-                <a:solidFill>
-                  <a:srgbClr val="40A070"/>
-                </a:solidFill>
-                <a:latin typeface="Courier"/>
-              </a:rPr>
-              <a:t>2</a:t>
-            </a:r>
-          </a:p>
-          <a:p>
-            <a:pPr lvl="0" indent="0">
-              <a:buNone/>
-            </a:pPr>
-            <a:r>
-              <a:rPr>
-                <a:latin typeface="Courier"/>
-              </a:rPr>
-              <a:t>[1]  3  6  8 10</a:t>
-            </a:r>
-          </a:p>
-          <a:p>
-            <a:pPr lvl="0" indent="0">
-              <a:buNone/>
-            </a:pPr>
-            <a:r>
-              <a:rPr>
-                <a:latin typeface="Courier"/>
-              </a:rPr>
-              <a:t>x </a:t>
-            </a:r>
-            <a:r>
-              <a:rPr>
-                <a:solidFill>
-                  <a:srgbClr val="4070A0"/>
-                </a:solidFill>
-                <a:latin typeface="Courier"/>
-              </a:rPr>
-              <a:t>*</a:t>
-            </a:r>
-            <a:r>
-              <a:rPr>
-                <a:latin typeface="Courier"/>
-              </a:rPr>
-              <a:t> </a:t>
-            </a:r>
-            <a:r>
-              <a:rPr>
-                <a:solidFill>
-                  <a:srgbClr val="40A070"/>
-                </a:solidFill>
-                <a:latin typeface="Courier"/>
-              </a:rPr>
-              <a:t>3</a:t>
-            </a:r>
-          </a:p>
-          <a:p>
-            <a:pPr lvl="0" indent="0">
-              <a:buNone/>
-            </a:pPr>
-            <a:r>
-              <a:rPr>
-                <a:latin typeface="Courier"/>
-              </a:rPr>
-              <a:t>[1]  3 12 18 24</a:t>
-            </a:r>
-          </a:p>
-          <a:p>
-            <a:pPr lvl="0" indent="0">
-              <a:buNone/>
-            </a:pPr>
-            <a:r>
-              <a:rPr>
-                <a:latin typeface="Courier"/>
-              </a:rPr>
-              <a:t>x </a:t>
-            </a:r>
-            <a:r>
-              <a:rPr>
-                <a:solidFill>
-                  <a:srgbClr val="4070A0"/>
-                </a:solidFill>
-                <a:latin typeface="Courier"/>
-              </a:rPr>
-              <a:t>+</a:t>
-            </a:r>
-            <a:r>
-              <a:rPr>
-                <a:latin typeface="Courier"/>
-              </a:rPr>
-              <a:t> </a:t>
-            </a:r>
-            <a:r>
-              <a:rPr>
-                <a:solidFill>
-                  <a:srgbClr val="06287E"/>
-                </a:solidFill>
-                <a:latin typeface="Courier"/>
-              </a:rPr>
-              <a:t>c</a:t>
-            </a:r>
-            <a:r>
-              <a:rPr>
-                <a:latin typeface="Courier"/>
-              </a:rPr>
-              <a:t>(</a:t>
-            </a:r>
-            <a:r>
-              <a:rPr>
-                <a:solidFill>
-                  <a:srgbClr val="40A070"/>
-                </a:solidFill>
-                <a:latin typeface="Courier"/>
-              </a:rPr>
-              <a:t>1</a:t>
-            </a:r>
-            <a:r>
-              <a:rPr>
-                <a:latin typeface="Courier"/>
-              </a:rPr>
-              <a:t>, </a:t>
-            </a:r>
-            <a:r>
-              <a:rPr>
-                <a:solidFill>
-                  <a:srgbClr val="40A070"/>
-                </a:solidFill>
-                <a:latin typeface="Courier"/>
-              </a:rPr>
-              <a:t>2</a:t>
-            </a:r>
-            <a:r>
-              <a:rPr>
-                <a:latin typeface="Courier"/>
-              </a:rPr>
-              <a:t>, </a:t>
-            </a:r>
-            <a:r>
-              <a:rPr>
-                <a:solidFill>
-                  <a:srgbClr val="40A070"/>
-                </a:solidFill>
-                <a:latin typeface="Courier"/>
-              </a:rPr>
-              <a:t>3</a:t>
-            </a:r>
-            <a:r>
-              <a:rPr>
-                <a:latin typeface="Courier"/>
-              </a:rPr>
-              <a:t>, </a:t>
-            </a:r>
-            <a:r>
-              <a:rPr>
-                <a:solidFill>
-                  <a:srgbClr val="40A070"/>
-                </a:solidFill>
-                <a:latin typeface="Courier"/>
-              </a:rPr>
-              <a:t>4</a:t>
-            </a:r>
-            <a:r>
-              <a:rPr>
-                <a:latin typeface="Courier"/>
-              </a:rPr>
-              <a:t>)</a:t>
-            </a:r>
-          </a:p>
-          <a:p>
-            <a:pPr lvl="0" indent="0">
-              <a:buNone/>
-            </a:pPr>
-            <a:r>
-              <a:rPr>
-                <a:latin typeface="Courier"/>
-              </a:rPr>
-              <a:t>[1]  2  6  9 12</a:t>
+              <a:t>Just open up the file to see the questions for lab. More about the file type soon!</a:t>
+            </a:r>
+          </a:p>
+          <a:p>
+            <a:pPr lvl="0" marL="0" indent="0">
+              <a:buNone/>
+            </a:pPr>
+            <a:r>
+              <a:rPr/>
+              <a:t>💻 </a:t>
+            </a:r>
+            <a:r>
+              <a:rPr>
+                <a:hlinkClick r:id="rId2"/>
+              </a:rPr>
+              <a:t>Lab</a:t>
             </a:r>
           </a:p>
         </p:txBody>
@@ -6800,7 +6686,7 @@
             </a:pPr>
             <a:r>
               <a:rPr/>
-              <a:t>But math can only be performed on numbers.</a:t>
+              <a:t>You can perform math with vectors.</a:t>
             </a:r>
           </a:p>
           <a:p>
@@ -6811,7 +6697,7 @@
               <a:rPr>
                 <a:latin typeface="Courier"/>
               </a:rPr>
-              <a:t>name2 </a:t>
+              <a:t>x </a:t>
             </a:r>
             <a:r>
               <a:rPr>
@@ -6835,8 +6721,166 @@
                 </a:solidFill>
                 <a:latin typeface="Courier"/>
               </a:rPr>
+              <a:t>2</a:t>
+            </a:r>
+          </a:p>
+          <a:p>
+            <a:pPr lvl="0" indent="0">
+              <a:buNone/>
+            </a:pPr>
+            <a:r>
+              <a:rPr>
+                <a:latin typeface="Courier"/>
+              </a:rPr>
+              <a:t>[1]  3  6  8 10</a:t>
+            </a:r>
+          </a:p>
+          <a:p>
+            <a:pPr lvl="0" indent="0">
+              <a:buNone/>
+            </a:pPr>
+            <a:r>
+              <a:rPr>
+                <a:latin typeface="Courier"/>
+              </a:rPr>
+              <a:t>x </a:t>
+            </a:r>
+            <a:r>
+              <a:rPr>
+                <a:solidFill>
+                  <a:srgbClr val="4070A0"/>
+                </a:solidFill>
+                <a:latin typeface="Courier"/>
+              </a:rPr>
+              <a:t>*</a:t>
+            </a:r>
+            <a:r>
+              <a:rPr>
+                <a:latin typeface="Courier"/>
+              </a:rPr>
+              <a:t> </a:t>
+            </a:r>
+            <a:r>
+              <a:rPr>
+                <a:solidFill>
+                  <a:srgbClr val="40A070"/>
+                </a:solidFill>
+                <a:latin typeface="Courier"/>
+              </a:rPr>
+              <a:t>3</a:t>
+            </a:r>
+          </a:p>
+          <a:p>
+            <a:pPr lvl="0" indent="0">
+              <a:buNone/>
+            </a:pPr>
+            <a:r>
+              <a:rPr>
+                <a:latin typeface="Courier"/>
+              </a:rPr>
+              <a:t>[1]  3 12 18 24</a:t>
+            </a:r>
+          </a:p>
+          <a:p>
+            <a:pPr lvl="0" indent="0">
+              <a:buNone/>
+            </a:pPr>
+            <a:r>
+              <a:rPr>
+                <a:latin typeface="Courier"/>
+              </a:rPr>
+              <a:t>x </a:t>
+            </a:r>
+            <a:r>
+              <a:rPr>
+                <a:solidFill>
+                  <a:srgbClr val="4070A0"/>
+                </a:solidFill>
+                <a:latin typeface="Courier"/>
+              </a:rPr>
+              <a:t>+</a:t>
+            </a:r>
+            <a:r>
+              <a:rPr>
+                <a:latin typeface="Courier"/>
+              </a:rPr>
+              <a:t> </a:t>
+            </a:r>
+            <a:r>
+              <a:rPr>
+                <a:solidFill>
+                  <a:srgbClr val="06287E"/>
+                </a:solidFill>
+                <a:latin typeface="Courier"/>
+              </a:rPr>
+              <a:t>c</a:t>
+            </a:r>
+            <a:r>
+              <a:rPr>
+                <a:latin typeface="Courier"/>
+              </a:rPr>
+              <a:t>(</a:t>
+            </a:r>
+            <a:r>
+              <a:rPr>
+                <a:solidFill>
+                  <a:srgbClr val="40A070"/>
+                </a:solidFill>
+                <a:latin typeface="Courier"/>
+              </a:rPr>
+              <a:t>1</a:t>
+            </a:r>
+            <a:r>
+              <a:rPr>
+                <a:latin typeface="Courier"/>
+              </a:rPr>
+              <a:t>, </a:t>
+            </a:r>
+            <a:r>
+              <a:rPr>
+                <a:solidFill>
+                  <a:srgbClr val="40A070"/>
+                </a:solidFill>
+                <a:latin typeface="Courier"/>
+              </a:rPr>
+              <a:t>2</a:t>
+            </a:r>
+            <a:r>
+              <a:rPr>
+                <a:latin typeface="Courier"/>
+              </a:rPr>
+              <a:t>, </a:t>
+            </a:r>
+            <a:r>
+              <a:rPr>
+                <a:solidFill>
+                  <a:srgbClr val="40A070"/>
+                </a:solidFill>
+                <a:latin typeface="Courier"/>
+              </a:rPr>
+              <a:t>3</a:t>
+            </a:r>
+            <a:r>
+              <a:rPr>
+                <a:latin typeface="Courier"/>
+              </a:rPr>
+              <a:t>, </a:t>
+            </a:r>
+            <a:r>
+              <a:rPr>
+                <a:solidFill>
+                  <a:srgbClr val="40A070"/>
+                </a:solidFill>
+                <a:latin typeface="Courier"/>
+              </a:rPr>
               <a:t>4</a:t>
             </a:r>
+            <a:r>
+              <a:rPr>
+                <a:latin typeface="Courier"/>
+              </a:rPr>
+              <a:t>)</a:t>
+            </a:r>
           </a:p>
           <a:p>
             <a:pPr lvl="0" indent="0">
@@ -6846,7 +6890,7 @@
               <a:rPr>
                 <a:latin typeface="Courier"/>
               </a:rPr>
-              <a:t>Error in name2 + 4: non-numeric argument to binary operator</a:t>
+              <a:t>[1]  2  6  9 12</a:t>
             </a:r>
           </a:p>
         </p:txBody>
@@ -6893,39 +6937,31 @@
             </a:pPr>
             <a:r>
               <a:rPr/>
-              <a:t>Reassigning</a:t>
-            </a:r>
-            <a:r>
-              <a:rPr/>
-              <a:t> </a:t>
-            </a:r>
-            <a:r>
-              <a:rPr/>
-              <a:t>to</a:t>
-            </a:r>
-            <a:r>
-              <a:rPr/>
-              <a:t> </a:t>
-            </a:r>
-            <a:r>
-              <a:rPr/>
-              <a:t>a</a:t>
-            </a:r>
-            <a:r>
-              <a:rPr/>
-              <a:t> </a:t>
-            </a:r>
-            <a:r>
-              <a:rPr/>
-              <a:t>new</a:t>
-            </a:r>
-            <a:r>
-              <a:rPr/>
-              <a:t> </a:t>
-            </a:r>
-            <a:r>
-              <a:rPr/>
-              <a:t>object</a:t>
+              <a:t>Math</a:t>
+            </a:r>
+            <a:r>
+              <a:rPr/>
+              <a:t> </a:t>
+            </a:r>
+            <a:r>
+              <a:rPr/>
+              <a:t>+</a:t>
+            </a:r>
+            <a:r>
+              <a:rPr/>
+              <a:t> </a:t>
+            </a:r>
+            <a:r>
+              <a:rPr/>
+              <a:t>vector</a:t>
+            </a:r>
+            <a:r>
+              <a:rPr/>
+              <a:t> </a:t>
+            </a:r>
+            <a:r>
+              <a:rPr/>
+              <a:t>objects</a:t>
             </a:r>
           </a:p>
         </p:txBody>
@@ -6950,17 +6986,7 @@
             </a:pPr>
             <a:r>
               <a:rPr/>
-              <a:t>Save these modified vectors as a new vector called </a:t>
-            </a:r>
-            <a:r>
-              <a:rPr>
-                <a:latin typeface="Courier"/>
-              </a:rPr>
-              <a:t>y</a:t>
-            </a:r>
-            <a:r>
-              <a:rPr/>
-              <a:t>.</a:t>
+              <a:t>But math can only be performed on numbers.</a:t>
             </a:r>
           </a:p>
           <a:p>
@@ -6971,22 +6997,7 @@
               <a:rPr>
                 <a:latin typeface="Courier"/>
               </a:rPr>
-              <a:t>y </a:t>
-            </a:r>
-            <a:r>
-              <a:rPr>
-                <a:solidFill>
-                  <a:srgbClr val="007020"/>
-                </a:solidFill>
-                <a:latin typeface="Courier"/>
-              </a:rPr>
-              <a:t>&lt;-</a:t>
-            </a:r>
-            <a:r>
-              <a:rPr>
-                <a:latin typeface="Courier"/>
-              </a:rPr>
-              <a:t> x </a:t>
+              <a:t>name2 </a:t>
             </a:r>
             <a:r>
               <a:rPr>
@@ -7006,85 +7017,12 @@
             <a:r>
               <a:rPr>
                 <a:solidFill>
-                  <a:srgbClr val="06287E"/>
-                </a:solidFill>
-                <a:latin typeface="Courier"/>
-              </a:rPr>
-              <a:t>c</a:t>
-            </a:r>
-            <a:r>
-              <a:rPr>
-                <a:latin typeface="Courier"/>
-              </a:rPr>
-              <a:t>(</a:t>
-            </a:r>
-            <a:r>
-              <a:rPr>
-                <a:solidFill>
                   <a:srgbClr val="40A070"/>
                 </a:solidFill>
                 <a:latin typeface="Courier"/>
               </a:rPr>
-              <a:t>1</a:t>
-            </a:r>
-            <a:r>
-              <a:rPr>
-                <a:latin typeface="Courier"/>
-              </a:rPr>
-              <a:t>, </a:t>
-            </a:r>
-            <a:r>
-              <a:rPr>
-                <a:solidFill>
-                  <a:srgbClr val="40A070"/>
-                </a:solidFill>
-                <a:latin typeface="Courier"/>
-              </a:rPr>
-              <a:t>2</a:t>
-            </a:r>
-            <a:r>
-              <a:rPr>
-                <a:latin typeface="Courier"/>
-              </a:rPr>
-              <a:t>, </a:t>
-            </a:r>
-            <a:r>
-              <a:rPr>
-                <a:solidFill>
-                  <a:srgbClr val="40A070"/>
-                </a:solidFill>
-                <a:latin typeface="Courier"/>
-              </a:rPr>
-              <a:t>3</a:t>
-            </a:r>
-            <a:r>
-              <a:rPr>
-                <a:latin typeface="Courier"/>
-              </a:rPr>
-              <a:t>, </a:t>
-            </a:r>
-            <a:r>
-              <a:rPr>
-                <a:solidFill>
-                  <a:srgbClr val="40A070"/>
-                </a:solidFill>
-                <a:latin typeface="Courier"/>
-              </a:rPr>
               <a:t>4</a:t>
             </a:r>
-            <a:r>
-              <a:rPr>
-                <a:latin typeface="Courier"/>
-              </a:rPr>
-              <a:t>)</a:t>
-            </a:r>
-            <a:br/>
-            <a:r>
-              <a:rPr>
-                <a:latin typeface="Courier"/>
-              </a:rPr>
-              <a:t>y</a:t>
-            </a:r>
           </a:p>
           <a:p>
             <a:pPr lvl="0" indent="0">
@@ -7094,26 +7032,7 @@
               <a:rPr>
                 <a:latin typeface="Courier"/>
               </a:rPr>
-              <a:t>[1]  2  6  9 12</a:t>
-            </a:r>
-          </a:p>
-          <a:p>
-            <a:pPr lvl="0" marL="0" indent="0">
-              <a:buNone/>
-            </a:pPr>
-            <a:r>
-              <a:rPr/>
-              <a:t>Note that the R object </a:t>
-            </a:r>
-            <a:r>
-              <a:rPr>
-                <a:latin typeface="Courier"/>
-              </a:rPr>
-              <a:t>y</a:t>
-            </a:r>
-            <a:r>
-              <a:rPr/>
-              <a:t> is no longer “hello world!” - It has been overwritten by assigning new data to the same name.</a:t>
+              <a:t>Error in name2 + 4: non-numeric argument to binary operator</a:t>
             </a:r>
           </a:p>
         </p:txBody>
@@ -7217,7 +7136,17 @@
             </a:pPr>
             <a:r>
               <a:rPr/>
-              <a:t>Reassigning allows you to make changes “in place”</a:t>
+              <a:t>Save these modified vectors as a new vector called </a:t>
+            </a:r>
+            <a:r>
+              <a:rPr>
+                <a:latin typeface="Courier"/>
+              </a:rPr>
+              <a:t>y</a:t>
+            </a:r>
+            <a:r>
+              <a:rPr/>
+              <a:t>.</a:t>
             </a:r>
           </a:p>
           <a:p>
@@ -7225,356 +7154,152 @@
               <a:buNone/>
             </a:pPr>
             <a:r>
-              <a:rPr i="1">
-                <a:solidFill>
-                  <a:srgbClr val="60A0B0"/>
-                </a:solidFill>
-                <a:latin typeface="Courier"/>
-              </a:rPr>
-              <a:t># results not stored:</a:t>
+              <a:rPr>
+                <a:latin typeface="Courier"/>
+              </a:rPr>
+              <a:t>y </a:t>
+            </a:r>
+            <a:r>
+              <a:rPr>
+                <a:solidFill>
+                  <a:srgbClr val="007020"/>
+                </a:solidFill>
+                <a:latin typeface="Courier"/>
+              </a:rPr>
+              <a:t>&lt;-</a:t>
+            </a:r>
+            <a:r>
+              <a:rPr>
+                <a:latin typeface="Courier"/>
+              </a:rPr>
+              <a:t> x </a:t>
+            </a:r>
+            <a:r>
+              <a:rPr>
+                <a:solidFill>
+                  <a:srgbClr val="4070A0"/>
+                </a:solidFill>
+                <a:latin typeface="Courier"/>
+              </a:rPr>
+              <a:t>+</a:t>
+            </a:r>
+            <a:r>
+              <a:rPr>
+                <a:latin typeface="Courier"/>
+              </a:rPr>
+              <a:t> </a:t>
+            </a:r>
+            <a:r>
+              <a:rPr>
+                <a:solidFill>
+                  <a:srgbClr val="06287E"/>
+                </a:solidFill>
+                <a:latin typeface="Courier"/>
+              </a:rPr>
+              <a:t>c</a:t>
+            </a:r>
+            <a:r>
+              <a:rPr>
+                <a:latin typeface="Courier"/>
+              </a:rPr>
+              <a:t>(</a:t>
+            </a:r>
+            <a:r>
+              <a:rPr>
+                <a:solidFill>
+                  <a:srgbClr val="40A070"/>
+                </a:solidFill>
+                <a:latin typeface="Courier"/>
+              </a:rPr>
+              <a:t>1</a:t>
+            </a:r>
+            <a:r>
+              <a:rPr>
+                <a:latin typeface="Courier"/>
+              </a:rPr>
+              <a:t>, </a:t>
+            </a:r>
+            <a:r>
+              <a:rPr>
+                <a:solidFill>
+                  <a:srgbClr val="40A070"/>
+                </a:solidFill>
+                <a:latin typeface="Courier"/>
+              </a:rPr>
+              <a:t>2</a:t>
+            </a:r>
+            <a:r>
+              <a:rPr>
+                <a:latin typeface="Courier"/>
+              </a:rPr>
+              <a:t>, </a:t>
+            </a:r>
+            <a:r>
+              <a:rPr>
+                <a:solidFill>
+                  <a:srgbClr val="40A070"/>
+                </a:solidFill>
+                <a:latin typeface="Courier"/>
+              </a:rPr>
+              <a:t>3</a:t>
+            </a:r>
+            <a:r>
+              <a:rPr>
+                <a:latin typeface="Courier"/>
+              </a:rPr>
+              <a:t>, </a:t>
+            </a:r>
+            <a:r>
+              <a:rPr>
+                <a:solidFill>
+                  <a:srgbClr val="40A070"/>
+                </a:solidFill>
+                <a:latin typeface="Courier"/>
+              </a:rPr>
+              <a:t>4</a:t>
+            </a:r>
+            <a:r>
+              <a:rPr>
+                <a:latin typeface="Courier"/>
+              </a:rPr>
+              <a:t>)</a:t>
             </a:r>
             <a:br/>
             <a:r>
               <a:rPr>
                 <a:latin typeface="Courier"/>
               </a:rPr>
-              <a:t>x </a:t>
-            </a:r>
-            <a:r>
-              <a:rPr>
-                <a:solidFill>
-                  <a:srgbClr val="4070A0"/>
-                </a:solidFill>
-                <a:latin typeface="Courier"/>
-              </a:rPr>
-              <a:t>+</a:t>
-            </a:r>
-            <a:r>
-              <a:rPr>
-                <a:latin typeface="Courier"/>
-              </a:rPr>
-              <a:t> </a:t>
-            </a:r>
-            <a:r>
-              <a:rPr>
-                <a:solidFill>
-                  <a:srgbClr val="06287E"/>
-                </a:solidFill>
-                <a:latin typeface="Courier"/>
-              </a:rPr>
-              <a:t>c</a:t>
-            </a:r>
-            <a:r>
-              <a:rPr>
-                <a:latin typeface="Courier"/>
-              </a:rPr>
-              <a:t>(</a:t>
-            </a:r>
-            <a:r>
-              <a:rPr>
-                <a:solidFill>
-                  <a:srgbClr val="40A070"/>
-                </a:solidFill>
-                <a:latin typeface="Courier"/>
-              </a:rPr>
-              <a:t>1</a:t>
-            </a:r>
-            <a:r>
-              <a:rPr>
-                <a:latin typeface="Courier"/>
-              </a:rPr>
-              <a:t>, </a:t>
-            </a:r>
-            <a:r>
-              <a:rPr>
-                <a:solidFill>
-                  <a:srgbClr val="40A070"/>
-                </a:solidFill>
-                <a:latin typeface="Courier"/>
-              </a:rPr>
-              <a:t>2</a:t>
-            </a:r>
-            <a:r>
-              <a:rPr>
-                <a:latin typeface="Courier"/>
-              </a:rPr>
-              <a:t>, </a:t>
-            </a:r>
-            <a:r>
-              <a:rPr>
-                <a:solidFill>
-                  <a:srgbClr val="40A070"/>
-                </a:solidFill>
-                <a:latin typeface="Courier"/>
-              </a:rPr>
-              <a:t>3</a:t>
-            </a:r>
-            <a:r>
-              <a:rPr>
-                <a:latin typeface="Courier"/>
-              </a:rPr>
-              <a:t>, </a:t>
-            </a:r>
-            <a:r>
-              <a:rPr>
-                <a:solidFill>
-                  <a:srgbClr val="40A070"/>
-                </a:solidFill>
-                <a:latin typeface="Courier"/>
-              </a:rPr>
-              <a:t>4</a:t>
-            </a:r>
-            <a:r>
-              <a:rPr>
-                <a:latin typeface="Courier"/>
-              </a:rPr>
-              <a:t>)</a:t>
-            </a:r>
-            <a:br/>
-            <a:br/>
-            <a:r>
-              <a:rPr i="1">
-                <a:solidFill>
-                  <a:srgbClr val="60A0B0"/>
-                </a:solidFill>
-                <a:latin typeface="Courier"/>
-              </a:rPr>
-              <a:t># x remains unchanged, results stored in `y`:</a:t>
-            </a:r>
-            <a:br/>
-            <a:r>
-              <a:rPr>
-                <a:latin typeface="Courier"/>
-              </a:rPr>
-              <a:t>y </a:t>
-            </a:r>
-            <a:r>
-              <a:rPr>
-                <a:solidFill>
-                  <a:srgbClr val="007020"/>
-                </a:solidFill>
-                <a:latin typeface="Courier"/>
-              </a:rPr>
-              <a:t>&lt;-</a:t>
-            </a:r>
-            <a:r>
-              <a:rPr>
-                <a:latin typeface="Courier"/>
-              </a:rPr>
-              <a:t> x </a:t>
-            </a:r>
-            <a:r>
-              <a:rPr>
-                <a:solidFill>
-                  <a:srgbClr val="4070A0"/>
-                </a:solidFill>
-                <a:latin typeface="Courier"/>
-              </a:rPr>
-              <a:t>+</a:t>
-            </a:r>
-            <a:r>
-              <a:rPr>
-                <a:latin typeface="Courier"/>
-              </a:rPr>
-              <a:t> </a:t>
-            </a:r>
-            <a:r>
-              <a:rPr>
-                <a:solidFill>
-                  <a:srgbClr val="06287E"/>
-                </a:solidFill>
-                <a:latin typeface="Courier"/>
-              </a:rPr>
-              <a:t>c</a:t>
-            </a:r>
-            <a:r>
-              <a:rPr>
-                <a:latin typeface="Courier"/>
-              </a:rPr>
-              <a:t>(</a:t>
-            </a:r>
-            <a:r>
-              <a:rPr>
-                <a:solidFill>
-                  <a:srgbClr val="40A070"/>
-                </a:solidFill>
-                <a:latin typeface="Courier"/>
-              </a:rPr>
-              <a:t>1</a:t>
-            </a:r>
-            <a:r>
-              <a:rPr>
-                <a:latin typeface="Courier"/>
-              </a:rPr>
-              <a:t>, </a:t>
-            </a:r>
-            <a:r>
-              <a:rPr>
-                <a:solidFill>
-                  <a:srgbClr val="40A070"/>
-                </a:solidFill>
-                <a:latin typeface="Courier"/>
-              </a:rPr>
-              <a:t>2</a:t>
-            </a:r>
-            <a:r>
-              <a:rPr>
-                <a:latin typeface="Courier"/>
-              </a:rPr>
-              <a:t>, </a:t>
-            </a:r>
-            <a:r>
-              <a:rPr>
-                <a:solidFill>
-                  <a:srgbClr val="40A070"/>
-                </a:solidFill>
-                <a:latin typeface="Courier"/>
-              </a:rPr>
-              <a:t>3</a:t>
-            </a:r>
-            <a:r>
-              <a:rPr>
-                <a:latin typeface="Courier"/>
-              </a:rPr>
-              <a:t>, </a:t>
-            </a:r>
-            <a:r>
-              <a:rPr>
-                <a:solidFill>
-                  <a:srgbClr val="40A070"/>
-                </a:solidFill>
-                <a:latin typeface="Courier"/>
-              </a:rPr>
-              <a:t>4</a:t>
-            </a:r>
-            <a:r>
-              <a:rPr>
-                <a:latin typeface="Courier"/>
-              </a:rPr>
-              <a:t>)</a:t>
-            </a:r>
-            <a:br/>
-            <a:br/>
-            <a:r>
-              <a:rPr i="1">
-                <a:solidFill>
-                  <a:srgbClr val="60A0B0"/>
-                </a:solidFill>
-                <a:latin typeface="Courier"/>
-              </a:rPr>
-              <a:t># replace `x` in place</a:t>
-            </a:r>
-            <a:br/>
-            <a:r>
-              <a:rPr>
-                <a:latin typeface="Courier"/>
-              </a:rPr>
-              <a:t>x </a:t>
-            </a:r>
-            <a:r>
-              <a:rPr>
-                <a:solidFill>
-                  <a:srgbClr val="007020"/>
-                </a:solidFill>
-                <a:latin typeface="Courier"/>
-              </a:rPr>
-              <a:t>&lt;-</a:t>
-            </a:r>
-            <a:r>
-              <a:rPr>
-                <a:latin typeface="Courier"/>
-              </a:rPr>
-              <a:t> x </a:t>
-            </a:r>
-            <a:r>
-              <a:rPr>
-                <a:solidFill>
-                  <a:srgbClr val="4070A0"/>
-                </a:solidFill>
-                <a:latin typeface="Courier"/>
-              </a:rPr>
-              <a:t>+</a:t>
-            </a:r>
-            <a:r>
-              <a:rPr>
-                <a:latin typeface="Courier"/>
-              </a:rPr>
-              <a:t> </a:t>
-            </a:r>
-            <a:r>
-              <a:rPr>
-                <a:solidFill>
-                  <a:srgbClr val="06287E"/>
-                </a:solidFill>
-                <a:latin typeface="Courier"/>
-              </a:rPr>
-              <a:t>c</a:t>
-            </a:r>
-            <a:r>
-              <a:rPr>
-                <a:latin typeface="Courier"/>
-              </a:rPr>
-              <a:t>(</a:t>
-            </a:r>
-            <a:r>
-              <a:rPr>
-                <a:solidFill>
-                  <a:srgbClr val="40A070"/>
-                </a:solidFill>
-                <a:latin typeface="Courier"/>
-              </a:rPr>
-              <a:t>1</a:t>
-            </a:r>
-            <a:r>
-              <a:rPr>
-                <a:latin typeface="Courier"/>
-              </a:rPr>
-              <a:t>, </a:t>
-            </a:r>
-            <a:r>
-              <a:rPr>
-                <a:solidFill>
-                  <a:srgbClr val="40A070"/>
-                </a:solidFill>
-                <a:latin typeface="Courier"/>
-              </a:rPr>
-              <a:t>2</a:t>
-            </a:r>
-            <a:r>
-              <a:rPr>
-                <a:latin typeface="Courier"/>
-              </a:rPr>
-              <a:t>, </a:t>
-            </a:r>
-            <a:r>
-              <a:rPr>
-                <a:solidFill>
-                  <a:srgbClr val="40A070"/>
-                </a:solidFill>
-                <a:latin typeface="Courier"/>
-              </a:rPr>
-              <a:t>3</a:t>
-            </a:r>
-            <a:r>
-              <a:rPr>
-                <a:latin typeface="Courier"/>
-              </a:rPr>
-              <a:t>, </a:t>
-            </a:r>
-            <a:r>
-              <a:rPr>
-                <a:solidFill>
-                  <a:srgbClr val="40A070"/>
-                </a:solidFill>
-                <a:latin typeface="Courier"/>
-              </a:rPr>
-              <a:t>4</a:t>
-            </a:r>
-            <a:r>
-              <a:rPr>
-                <a:latin typeface="Courier"/>
-              </a:rPr>
-              <a:t>)</a:t>
+              <a:t>y</a:t>
+            </a:r>
+          </a:p>
+          <a:p>
+            <a:pPr lvl="0" indent="0">
+              <a:buNone/>
+            </a:pPr>
+            <a:r>
+              <a:rPr>
+                <a:latin typeface="Courier"/>
+              </a:rPr>
+              <a:t>[1]  2  6  9 12</a:t>
+            </a:r>
+          </a:p>
+          <a:p>
+            <a:pPr lvl="0" marL="0" indent="0">
+              <a:buNone/>
+            </a:pPr>
+            <a:r>
+              <a:rPr/>
+              <a:t>Note that the R object </a:t>
+            </a:r>
+            <a:r>
+              <a:rPr>
+                <a:latin typeface="Courier"/>
+              </a:rPr>
+              <a:t>y</a:t>
+            </a:r>
+            <a:r>
+              <a:rPr/>
+              <a:t> is no longer “hello world!” - It has been overwritten by assigning new data to the same name.</a:t>
             </a:r>
           </a:p>
         </p:txBody>
@@ -7621,15 +7346,39 @@
             </a:pPr>
             <a:r>
               <a:rPr/>
-              <a:t>R</a:t>
-            </a:r>
-            <a:r>
-              <a:rPr/>
-              <a:t> </a:t>
-            </a:r>
-            <a:r>
-              <a:rPr/>
-              <a:t>objects</a:t>
+              <a:t>Reassigning</a:t>
+            </a:r>
+            <a:r>
+              <a:rPr/>
+              <a:t> </a:t>
+            </a:r>
+            <a:r>
+              <a:rPr/>
+              <a:t>to</a:t>
+            </a:r>
+            <a:r>
+              <a:rPr/>
+              <a:t> </a:t>
+            </a:r>
+            <a:r>
+              <a:rPr/>
+              <a:t>a</a:t>
+            </a:r>
+            <a:r>
+              <a:rPr/>
+              <a:t> </a:t>
+            </a:r>
+            <a:r>
+              <a:rPr/>
+              <a:t>new</a:t>
+            </a:r>
+            <a:r>
+              <a:rPr/>
+              <a:t> </a:t>
+            </a:r>
+            <a:r>
+              <a:rPr/>
+              <a:t>object</a:t>
             </a:r>
           </a:p>
         </p:txBody>
@@ -7654,17 +7403,7 @@
             </a:pPr>
             <a:r>
               <a:rPr/>
-              <a:t>You can get more attributes than just class. The function </a:t>
-            </a:r>
-            <a:r>
-              <a:rPr>
-                <a:latin typeface="Courier"/>
-              </a:rPr>
-              <a:t>str()</a:t>
-            </a:r>
-            <a:r>
-              <a:rPr/>
-              <a:t> gives you the structure of the object.</a:t>
+              <a:t>Reassigning allows you to make changes “in place”</a:t>
             </a:r>
           </a:p>
           <a:p>
@@ -7672,36 +7411,159 @@
               <a:buNone/>
             </a:pPr>
             <a:r>
+              <a:rPr i="1">
+                <a:solidFill>
+                  <a:srgbClr val="60A0B0"/>
+                </a:solidFill>
+                <a:latin typeface="Courier"/>
+              </a:rPr>
+              <a:t># results not stored:</a:t>
+            </a:r>
+            <a:br/>
+            <a:r>
+              <a:rPr>
+                <a:latin typeface="Courier"/>
+              </a:rPr>
+              <a:t>x </a:t>
+            </a:r>
+            <a:r>
+              <a:rPr>
+                <a:solidFill>
+                  <a:srgbClr val="4070A0"/>
+                </a:solidFill>
+                <a:latin typeface="Courier"/>
+              </a:rPr>
+              <a:t>+</a:t>
+            </a:r>
+            <a:r>
+              <a:rPr>
+                <a:latin typeface="Courier"/>
+              </a:rPr>
+              <a:t> </a:t>
+            </a:r>
+            <a:r>
               <a:rPr>
                 <a:solidFill>
                   <a:srgbClr val="06287E"/>
                 </a:solidFill>
                 <a:latin typeface="Courier"/>
               </a:rPr>
-              <a:t>str</a:t>
-            </a:r>
-            <a:r>
-              <a:rPr>
-                <a:latin typeface="Courier"/>
-              </a:rPr>
-              <a:t>(x)</a:t>
-            </a:r>
-          </a:p>
-          <a:p>
-            <a:pPr lvl="0" indent="0">
-              <a:buNone/>
-            </a:pPr>
-            <a:r>
-              <a:rPr>
-                <a:latin typeface="Courier"/>
-              </a:rPr>
-              <a:t> num [1:4] 1 4 6 8</a:t>
-            </a:r>
-          </a:p>
-          <a:p>
-            <a:pPr lvl="0" indent="0">
-              <a:buNone/>
-            </a:pPr>
+              <a:t>c</a:t>
+            </a:r>
+            <a:r>
+              <a:rPr>
+                <a:latin typeface="Courier"/>
+              </a:rPr>
+              <a:t>(</a:t>
+            </a:r>
+            <a:r>
+              <a:rPr>
+                <a:solidFill>
+                  <a:srgbClr val="40A070"/>
+                </a:solidFill>
+                <a:latin typeface="Courier"/>
+              </a:rPr>
+              <a:t>1</a:t>
+            </a:r>
+            <a:r>
+              <a:rPr>
+                <a:latin typeface="Courier"/>
+              </a:rPr>
+              <a:t>, </a:t>
+            </a:r>
+            <a:r>
+              <a:rPr>
+                <a:solidFill>
+                  <a:srgbClr val="40A070"/>
+                </a:solidFill>
+                <a:latin typeface="Courier"/>
+              </a:rPr>
+              <a:t>2</a:t>
+            </a:r>
+            <a:r>
+              <a:rPr>
+                <a:latin typeface="Courier"/>
+              </a:rPr>
+              <a:t>, </a:t>
+            </a:r>
+            <a:r>
+              <a:rPr>
+                <a:solidFill>
+                  <a:srgbClr val="40A070"/>
+                </a:solidFill>
+                <a:latin typeface="Courier"/>
+              </a:rPr>
+              <a:t>3</a:t>
+            </a:r>
+            <a:r>
+              <a:rPr>
+                <a:latin typeface="Courier"/>
+              </a:rPr>
+              <a:t>, </a:t>
+            </a:r>
+            <a:r>
+              <a:rPr>
+                <a:solidFill>
+                  <a:srgbClr val="40A070"/>
+                </a:solidFill>
+                <a:latin typeface="Courier"/>
+              </a:rPr>
+              <a:t>4</a:t>
+            </a:r>
+            <a:r>
+              <a:rPr>
+                <a:latin typeface="Courier"/>
+              </a:rPr>
+              <a:t>)</a:t>
+            </a:r>
+            <a:br/>
+            <a:br/>
+            <a:r>
+              <a:rPr i="1">
+                <a:solidFill>
+                  <a:srgbClr val="60A0B0"/>
+                </a:solidFill>
+                <a:latin typeface="Courier"/>
+              </a:rPr>
+              <a:t># x remains unchanged, results stored in `y`:</a:t>
+            </a:r>
+            <a:br/>
+            <a:r>
+              <a:rPr>
+                <a:latin typeface="Courier"/>
+              </a:rPr>
+              <a:t>y </a:t>
+            </a:r>
+            <a:r>
+              <a:rPr>
+                <a:solidFill>
+                  <a:srgbClr val="007020"/>
+                </a:solidFill>
+                <a:latin typeface="Courier"/>
+              </a:rPr>
+              <a:t>&lt;-</a:t>
+            </a:r>
+            <a:r>
+              <a:rPr>
+                <a:latin typeface="Courier"/>
+              </a:rPr>
+              <a:t> x </a:t>
+            </a:r>
+            <a:r>
+              <a:rPr>
+                <a:solidFill>
+                  <a:srgbClr val="4070A0"/>
+                </a:solidFill>
+                <a:latin typeface="Courier"/>
+              </a:rPr>
+              <a:t>+</a:t>
+            </a:r>
+            <a:r>
+              <a:rPr>
+                <a:latin typeface="Courier"/>
+              </a:rPr>
+              <a:t> </a:t>
+            </a:r>
             <a:r>
               <a:rPr>
                 <a:solidFill>
@@ -7709,43 +7571,196 @@
                 </a:solidFill>
                 <a:latin typeface="Courier"/>
               </a:rPr>
-              <a:t>str</a:t>
-            </a:r>
-            <a:r>
-              <a:rPr>
-                <a:latin typeface="Courier"/>
-              </a:rPr>
-              <a:t>(y)</a:t>
-            </a:r>
-          </a:p>
-          <a:p>
-            <a:pPr lvl="0" indent="0">
-              <a:buNone/>
-            </a:pPr>
-            <a:r>
-              <a:rPr>
-                <a:latin typeface="Courier"/>
-              </a:rPr>
-              <a:t> num [1:4] 2 6 9 12</a:t>
-            </a:r>
-          </a:p>
-          <a:p>
-            <a:pPr lvl="0" marL="0" indent="0">
-              <a:buNone/>
-            </a:pPr>
-            <a:r>
-              <a:rPr/>
-              <a:t>This tells you that </a:t>
-            </a:r>
-            <a:r>
-              <a:rPr>
-                <a:latin typeface="Courier"/>
-              </a:rPr>
-              <a:t>x</a:t>
-            </a:r>
-            <a:r>
-              <a:rPr/>
-              <a:t> is a numeric vector and tells you the length.</a:t>
+              <a:t>c</a:t>
+            </a:r>
+            <a:r>
+              <a:rPr>
+                <a:latin typeface="Courier"/>
+              </a:rPr>
+              <a:t>(</a:t>
+            </a:r>
+            <a:r>
+              <a:rPr>
+                <a:solidFill>
+                  <a:srgbClr val="40A070"/>
+                </a:solidFill>
+                <a:latin typeface="Courier"/>
+              </a:rPr>
+              <a:t>1</a:t>
+            </a:r>
+            <a:r>
+              <a:rPr>
+                <a:latin typeface="Courier"/>
+              </a:rPr>
+              <a:t>, </a:t>
+            </a:r>
+            <a:r>
+              <a:rPr>
+                <a:solidFill>
+                  <a:srgbClr val="40A070"/>
+                </a:solidFill>
+                <a:latin typeface="Courier"/>
+              </a:rPr>
+              <a:t>2</a:t>
+            </a:r>
+            <a:r>
+              <a:rPr>
+                <a:latin typeface="Courier"/>
+              </a:rPr>
+              <a:t>, </a:t>
+            </a:r>
+            <a:r>
+              <a:rPr>
+                <a:solidFill>
+                  <a:srgbClr val="40A070"/>
+                </a:solidFill>
+                <a:latin typeface="Courier"/>
+              </a:rPr>
+              <a:t>3</a:t>
+            </a:r>
+            <a:r>
+              <a:rPr>
+                <a:latin typeface="Courier"/>
+              </a:rPr>
+              <a:t>, </a:t>
+            </a:r>
+            <a:r>
+              <a:rPr>
+                <a:solidFill>
+                  <a:srgbClr val="40A070"/>
+                </a:solidFill>
+                <a:latin typeface="Courier"/>
+              </a:rPr>
+              <a:t>4</a:t>
+            </a:r>
+            <a:r>
+              <a:rPr>
+                <a:latin typeface="Courier"/>
+              </a:rPr>
+              <a:t>)</a:t>
+            </a:r>
+            <a:br/>
+            <a:br/>
+            <a:r>
+              <a:rPr i="1">
+                <a:solidFill>
+                  <a:srgbClr val="60A0B0"/>
+                </a:solidFill>
+                <a:latin typeface="Courier"/>
+              </a:rPr>
+              <a:t># replace `x` in place</a:t>
+            </a:r>
+            <a:br/>
+            <a:r>
+              <a:rPr>
+                <a:latin typeface="Courier"/>
+              </a:rPr>
+              <a:t>x </a:t>
+            </a:r>
+            <a:r>
+              <a:rPr>
+                <a:solidFill>
+                  <a:srgbClr val="007020"/>
+                </a:solidFill>
+                <a:latin typeface="Courier"/>
+              </a:rPr>
+              <a:t>&lt;-</a:t>
+            </a:r>
+            <a:r>
+              <a:rPr>
+                <a:latin typeface="Courier"/>
+              </a:rPr>
+              <a:t> x </a:t>
+            </a:r>
+            <a:r>
+              <a:rPr>
+                <a:solidFill>
+                  <a:srgbClr val="4070A0"/>
+                </a:solidFill>
+                <a:latin typeface="Courier"/>
+              </a:rPr>
+              <a:t>+</a:t>
+            </a:r>
+            <a:r>
+              <a:rPr>
+                <a:latin typeface="Courier"/>
+              </a:rPr>
+              <a:t> </a:t>
+            </a:r>
+            <a:r>
+              <a:rPr>
+                <a:solidFill>
+                  <a:srgbClr val="06287E"/>
+                </a:solidFill>
+                <a:latin typeface="Courier"/>
+              </a:rPr>
+              <a:t>c</a:t>
+            </a:r>
+            <a:r>
+              <a:rPr>
+                <a:latin typeface="Courier"/>
+              </a:rPr>
+              <a:t>(</a:t>
+            </a:r>
+            <a:r>
+              <a:rPr>
+                <a:solidFill>
+                  <a:srgbClr val="40A070"/>
+                </a:solidFill>
+                <a:latin typeface="Courier"/>
+              </a:rPr>
+              <a:t>1</a:t>
+            </a:r>
+            <a:r>
+              <a:rPr>
+                <a:latin typeface="Courier"/>
+              </a:rPr>
+              <a:t>, </a:t>
+            </a:r>
+            <a:r>
+              <a:rPr>
+                <a:solidFill>
+                  <a:srgbClr val="40A070"/>
+                </a:solidFill>
+                <a:latin typeface="Courier"/>
+              </a:rPr>
+              <a:t>2</a:t>
+            </a:r>
+            <a:r>
+              <a:rPr>
+                <a:latin typeface="Courier"/>
+              </a:rPr>
+              <a:t>, </a:t>
+            </a:r>
+            <a:r>
+              <a:rPr>
+                <a:solidFill>
+                  <a:srgbClr val="40A070"/>
+                </a:solidFill>
+                <a:latin typeface="Courier"/>
+              </a:rPr>
+              <a:t>3</a:t>
+            </a:r>
+            <a:r>
+              <a:rPr>
+                <a:latin typeface="Courier"/>
+              </a:rPr>
+              <a:t>, </a:t>
+            </a:r>
+            <a:r>
+              <a:rPr>
+                <a:solidFill>
+                  <a:srgbClr val="40A070"/>
+                </a:solidFill>
+                <a:latin typeface="Courier"/>
+              </a:rPr>
+              <a:t>4</a:t>
+            </a:r>
+            <a:r>
+              <a:rPr>
+                <a:latin typeface="Courier"/>
+              </a:rPr>
+              <a:t>)</a:t>
             </a:r>
           </a:p>
         </p:txBody>
@@ -7792,31 +7807,15 @@
             </a:pPr>
             <a:r>
               <a:rPr/>
-              <a:t>Basic</a:t>
-            </a:r>
-            <a:r>
-              <a:rPr/>
-              <a:t> </a:t>
-            </a:r>
-            <a:r>
-              <a:rPr/>
-              <a:t>terms:</a:t>
-            </a:r>
-            <a:r>
-              <a:rPr/>
-              <a:t> </a:t>
-            </a:r>
-            <a:r>
-              <a:rPr/>
-              <a:t>“</a:t>
-            </a:r>
-            <a:r>
-              <a:rPr/>
-              <a:t>argument</a:t>
-            </a:r>
-            <a:r>
-              <a:rPr/>
-              <a:t>”</a:t>
+              <a:t>R</a:t>
+            </a:r>
+            <a:r>
+              <a:rPr/>
+              <a:t> </a:t>
+            </a:r>
+            <a:r>
+              <a:rPr/>
+              <a:t>objects</a:t>
             </a:r>
           </a:p>
         </p:txBody>
@@ -7840,33 +7839,80 @@
               <a:buNone/>
             </a:pPr>
             <a:r>
-              <a:rPr b="1"/>
-              <a:t>Argument</a:t>
-            </a:r>
-            <a:r>
-              <a:rPr/>
-              <a:t> - what you pass to a function</a:t>
-            </a:r>
-          </a:p>
-          <a:p>
-            <a:pPr lvl="1"/>
-            <a:r>
-              <a:rPr/>
-              <a:t>can be data like the number 1 or 20234</a:t>
-            </a:r>
-          </a:p>
-          <a:p>
-            <a:pPr lvl="1"/>
-            <a:r>
-              <a:rPr/>
-              <a:t>can be options about how you want the function to work</a:t>
-            </a:r>
-          </a:p>
-          <a:p>
-            <a:pPr lvl="1"/>
-            <a:r>
-              <a:rPr/>
-              <a:t>separated by commas</a:t>
+              <a:rPr/>
+              <a:t>You can get more attributes than just class. The function </a:t>
+            </a:r>
+            <a:r>
+              <a:rPr>
+                <a:latin typeface="Courier"/>
+              </a:rPr>
+              <a:t>str()</a:t>
+            </a:r>
+            <a:r>
+              <a:rPr/>
+              <a:t> gives you the structure of the object.</a:t>
+            </a:r>
+          </a:p>
+          <a:p>
+            <a:pPr lvl="0" indent="0">
+              <a:buNone/>
+            </a:pPr>
+            <a:r>
+              <a:rPr>
+                <a:solidFill>
+                  <a:srgbClr val="06287E"/>
+                </a:solidFill>
+                <a:latin typeface="Courier"/>
+              </a:rPr>
+              <a:t>str</a:t>
+            </a:r>
+            <a:r>
+              <a:rPr>
+                <a:latin typeface="Courier"/>
+              </a:rPr>
+              <a:t>(x)</a:t>
+            </a:r>
+          </a:p>
+          <a:p>
+            <a:pPr lvl="0" indent="0">
+              <a:buNone/>
+            </a:pPr>
+            <a:r>
+              <a:rPr>
+                <a:latin typeface="Courier"/>
+              </a:rPr>
+              <a:t> num [1:4] 1 4 6 8</a:t>
+            </a:r>
+          </a:p>
+          <a:p>
+            <a:pPr lvl="0" indent="0">
+              <a:buNone/>
+            </a:pPr>
+            <a:r>
+              <a:rPr>
+                <a:solidFill>
+                  <a:srgbClr val="06287E"/>
+                </a:solidFill>
+                <a:latin typeface="Courier"/>
+              </a:rPr>
+              <a:t>str</a:t>
+            </a:r>
+            <a:r>
+              <a:rPr>
+                <a:latin typeface="Courier"/>
+              </a:rPr>
+              <a:t>(y)</a:t>
+            </a:r>
+          </a:p>
+          <a:p>
+            <a:pPr lvl="0" indent="0">
+              <a:buNone/>
+            </a:pPr>
+            <a:r>
+              <a:rPr>
+                <a:latin typeface="Courier"/>
+              </a:rPr>
+              <a:t> num [1:4] 2 6 9 12</a:t>
             </a:r>
           </a:p>
           <a:p>
@@ -7875,15 +7921,17 @@
             </a:pPr>
             <a:r>
               <a:rPr/>
-              <a:t>Like an </a:t>
-            </a:r>
-            <a:r>
-              <a:rPr b="1"/>
-              <a:t>adverb</a:t>
-            </a:r>
-            <a:r>
-              <a:rPr/>
-              <a:t>.</a:t>
+              <a:t>This tells you that </a:t>
+            </a:r>
+            <a:r>
+              <a:rPr>
+                <a:latin typeface="Courier"/>
+              </a:rPr>
+              <a:t>x</a:t>
+            </a:r>
+            <a:r>
+              <a:rPr/>
+              <a:t> is a numeric vector and tells you the length.</a:t>
             </a:r>
           </a:p>
         </p:txBody>
@@ -7930,33 +7978,31 @@
             </a:pPr>
             <a:r>
               <a:rPr/>
-              <a:t>Create</a:t>
-            </a:r>
-            <a:r>
-              <a:rPr/>
-              <a:t> </a:t>
-            </a:r>
-            <a:r>
-              <a:rPr/>
-              <a:t>vectors</a:t>
-            </a:r>
-            <a:r>
-              <a:rPr/>
-              <a:t> </a:t>
-            </a:r>
-            <a:r>
-              <a:rPr/>
-              <a:t>with</a:t>
-            </a:r>
-            <a:r>
-              <a:rPr/>
-              <a:t> </a:t>
-            </a:r>
-            <a:r>
-              <a:rPr>
-                <a:latin typeface="Courier"/>
-              </a:rPr>
-              <a:t>seq()</a:t>
+              <a:t>Basic</a:t>
+            </a:r>
+            <a:r>
+              <a:rPr/>
+              <a:t> </a:t>
+            </a:r>
+            <a:r>
+              <a:rPr/>
+              <a:t>terms:</a:t>
+            </a:r>
+            <a:r>
+              <a:rPr/>
+              <a:t> </a:t>
+            </a:r>
+            <a:r>
+              <a:rPr/>
+              <a:t>“</a:t>
+            </a:r>
+            <a:r>
+              <a:rPr/>
+              <a:t>argument</a:t>
+            </a:r>
+            <a:r>
+              <a:rPr/>
+              <a:t>”</a:t>
             </a:r>
           </a:p>
         </p:txBody>
@@ -7980,458 +8026,50 @@
               <a:buNone/>
             </a:pPr>
             <a:r>
-              <a:rPr/>
-              <a:t>For numeric: </a:t>
-            </a:r>
-            <a:r>
-              <a:rPr>
-                <a:latin typeface="Courier"/>
-              </a:rPr>
-              <a:t>seq()</a:t>
+              <a:rPr b="1"/>
+              <a:t>Argument</a:t>
+            </a:r>
+            <a:r>
+              <a:rPr/>
+              <a:t> - what you pass to a function</a:t>
             </a:r>
           </a:p>
           <a:p>
             <a:pPr lvl="1"/>
             <a:r>
               <a:rPr/>
-              <a:t>The </a:t>
-            </a:r>
-            <a:r>
-              <a:rPr>
-                <a:latin typeface="Courier"/>
-              </a:rPr>
-              <a:t>from</a:t>
-            </a:r>
-            <a:r>
-              <a:rPr/>
-              <a:t> argument says what number to start on.</a:t>
-            </a:r>
-            <a:br/>
+              <a:t>can be data like the number 1 or 20234</a:t>
+            </a:r>
           </a:p>
           <a:p>
             <a:pPr lvl="1"/>
             <a:r>
               <a:rPr/>
-              <a:t>The </a:t>
-            </a:r>
-            <a:r>
-              <a:rPr>
-                <a:latin typeface="Courier"/>
-              </a:rPr>
-              <a:t>to</a:t>
-            </a:r>
-            <a:r>
-              <a:rPr/>
-              <a:t> argument says what number to not go above.</a:t>
-            </a:r>
-            <a:br/>
+              <a:t>can be options about how you want the function to work</a:t>
+            </a:r>
           </a:p>
           <a:p>
             <a:pPr lvl="1"/>
             <a:r>
               <a:rPr/>
-              <a:t>The </a:t>
-            </a:r>
-            <a:r>
-              <a:rPr>
-                <a:latin typeface="Courier"/>
-              </a:rPr>
-              <a:t>by</a:t>
-            </a:r>
-            <a:r>
-              <a:rPr/>
-              <a:t> argument says how much to increment by.</a:t>
-            </a:r>
-            <a:br/>
-          </a:p>
-          <a:p>
-            <a:pPr lvl="1"/>
-            <a:r>
-              <a:rPr/>
-              <a:t>The </a:t>
-            </a:r>
-            <a:r>
-              <a:rPr>
-                <a:latin typeface="Courier"/>
-              </a:rPr>
-              <a:t>length.out</a:t>
-            </a:r>
-            <a:r>
-              <a:rPr/>
-              <a:t> argument says how long the vector should be overall.</a:t>
-            </a:r>
-          </a:p>
-          <a:p>
-            <a:pPr lvl="0" indent="0">
-              <a:buNone/>
-            </a:pPr>
-            <a:r>
-              <a:rPr>
-                <a:solidFill>
-                  <a:srgbClr val="06287E"/>
-                </a:solidFill>
-                <a:latin typeface="Courier"/>
-              </a:rPr>
-              <a:t>seq</a:t>
-            </a:r>
-            <a:r>
-              <a:rPr>
-                <a:latin typeface="Courier"/>
-              </a:rPr>
-              <a:t>(</a:t>
-            </a:r>
-            <a:r>
-              <a:rPr>
-                <a:solidFill>
-                  <a:srgbClr val="7D9029"/>
-                </a:solidFill>
-                <a:latin typeface="Courier"/>
-              </a:rPr>
-              <a:t>from =</a:t>
-            </a:r>
-            <a:r>
-              <a:rPr>
-                <a:latin typeface="Courier"/>
-              </a:rPr>
-              <a:t> </a:t>
-            </a:r>
-            <a:r>
-              <a:rPr>
-                <a:solidFill>
-                  <a:srgbClr val="40A070"/>
-                </a:solidFill>
-                <a:latin typeface="Courier"/>
-              </a:rPr>
-              <a:t>0</a:t>
-            </a:r>
-            <a:r>
-              <a:rPr>
-                <a:latin typeface="Courier"/>
-              </a:rPr>
-              <a:t>, </a:t>
-            </a:r>
-            <a:r>
-              <a:rPr>
-                <a:solidFill>
-                  <a:srgbClr val="7D9029"/>
-                </a:solidFill>
-                <a:latin typeface="Courier"/>
-              </a:rPr>
-              <a:t>to =</a:t>
-            </a:r>
-            <a:r>
-              <a:rPr>
-                <a:latin typeface="Courier"/>
-              </a:rPr>
-              <a:t> </a:t>
-            </a:r>
-            <a:r>
-              <a:rPr>
-                <a:solidFill>
-                  <a:srgbClr val="40A070"/>
-                </a:solidFill>
-                <a:latin typeface="Courier"/>
-              </a:rPr>
-              <a:t>1</a:t>
-            </a:r>
-            <a:r>
-              <a:rPr>
-                <a:latin typeface="Courier"/>
-              </a:rPr>
-              <a:t>, </a:t>
-            </a:r>
-            <a:r>
-              <a:rPr>
-                <a:solidFill>
-                  <a:srgbClr val="7D9029"/>
-                </a:solidFill>
-                <a:latin typeface="Courier"/>
-              </a:rPr>
-              <a:t>by =</a:t>
-            </a:r>
-            <a:r>
-              <a:rPr>
-                <a:latin typeface="Courier"/>
-              </a:rPr>
-              <a:t> </a:t>
-            </a:r>
-            <a:r>
-              <a:rPr>
-                <a:solidFill>
-                  <a:srgbClr val="40A070"/>
-                </a:solidFill>
-                <a:latin typeface="Courier"/>
-              </a:rPr>
-              <a:t>0.2</a:t>
-            </a:r>
-            <a:r>
-              <a:rPr>
-                <a:latin typeface="Courier"/>
-              </a:rPr>
-              <a:t>)</a:t>
-            </a:r>
-          </a:p>
-          <a:p>
-            <a:pPr lvl="0" indent="0">
-              <a:buNone/>
-            </a:pPr>
-            <a:r>
-              <a:rPr>
-                <a:latin typeface="Courier"/>
-              </a:rPr>
-              <a:t>[1] 0.0 0.2 0.4 0.6 0.8 1.0</a:t>
-            </a:r>
-          </a:p>
-          <a:p>
-            <a:pPr lvl="0" indent="0">
-              <a:buNone/>
-            </a:pPr>
-            <a:r>
-              <a:rPr>
-                <a:solidFill>
-                  <a:srgbClr val="06287E"/>
-                </a:solidFill>
-                <a:latin typeface="Courier"/>
-              </a:rPr>
-              <a:t>seq</a:t>
-            </a:r>
-            <a:r>
-              <a:rPr>
-                <a:latin typeface="Courier"/>
-              </a:rPr>
-              <a:t>(</a:t>
-            </a:r>
-            <a:r>
-              <a:rPr>
-                <a:solidFill>
-                  <a:srgbClr val="7D9029"/>
-                </a:solidFill>
-                <a:latin typeface="Courier"/>
-              </a:rPr>
-              <a:t>from =</a:t>
-            </a:r>
-            <a:r>
-              <a:rPr>
-                <a:latin typeface="Courier"/>
-              </a:rPr>
-              <a:t> </a:t>
-            </a:r>
-            <a:r>
-              <a:rPr>
-                <a:solidFill>
-                  <a:srgbClr val="40A070"/>
-                </a:solidFill>
-                <a:latin typeface="Courier"/>
-              </a:rPr>
-              <a:t>0</a:t>
-            </a:r>
-            <a:r>
-              <a:rPr>
-                <a:latin typeface="Courier"/>
-              </a:rPr>
-              <a:t>, </a:t>
-            </a:r>
-            <a:r>
-              <a:rPr>
-                <a:solidFill>
-                  <a:srgbClr val="7D9029"/>
-                </a:solidFill>
-                <a:latin typeface="Courier"/>
-              </a:rPr>
-              <a:t>to =</a:t>
-            </a:r>
-            <a:r>
-              <a:rPr>
-                <a:latin typeface="Courier"/>
-              </a:rPr>
-              <a:t> </a:t>
-            </a:r>
-            <a:r>
-              <a:rPr>
-                <a:solidFill>
-                  <a:srgbClr val="40A070"/>
-                </a:solidFill>
-                <a:latin typeface="Courier"/>
-              </a:rPr>
-              <a:t>10</a:t>
-            </a:r>
-            <a:r>
-              <a:rPr>
-                <a:latin typeface="Courier"/>
-              </a:rPr>
-              <a:t>, </a:t>
-            </a:r>
-            <a:r>
-              <a:rPr>
-                <a:solidFill>
-                  <a:srgbClr val="7D9029"/>
-                </a:solidFill>
-                <a:latin typeface="Courier"/>
-              </a:rPr>
-              <a:t>by =</a:t>
-            </a:r>
-            <a:r>
-              <a:rPr>
-                <a:latin typeface="Courier"/>
-              </a:rPr>
-              <a:t> </a:t>
-            </a:r>
-            <a:r>
-              <a:rPr>
-                <a:solidFill>
-                  <a:srgbClr val="40A070"/>
-                </a:solidFill>
-                <a:latin typeface="Courier"/>
-              </a:rPr>
-              <a:t>1</a:t>
-            </a:r>
-            <a:r>
-              <a:rPr>
-                <a:latin typeface="Courier"/>
-              </a:rPr>
-              <a:t>)</a:t>
-            </a:r>
-          </a:p>
-          <a:p>
-            <a:pPr lvl="0" indent="0">
-              <a:buNone/>
-            </a:pPr>
-            <a:r>
-              <a:rPr>
-                <a:latin typeface="Courier"/>
-              </a:rPr>
-              <a:t> [1]  0  1  2  3  4  5  6  7  8  9 10</a:t>
-            </a:r>
-          </a:p>
-          <a:p>
-            <a:pPr lvl="0" indent="0">
-              <a:buNone/>
-            </a:pPr>
-            <a:r>
-              <a:rPr>
-                <a:solidFill>
-                  <a:srgbClr val="06287E"/>
-                </a:solidFill>
-                <a:latin typeface="Courier"/>
-              </a:rPr>
-              <a:t>seq</a:t>
-            </a:r>
-            <a:r>
-              <a:rPr>
-                <a:latin typeface="Courier"/>
-              </a:rPr>
-              <a:t>(</a:t>
-            </a:r>
-            <a:r>
-              <a:rPr>
-                <a:solidFill>
-                  <a:srgbClr val="7D9029"/>
-                </a:solidFill>
-                <a:latin typeface="Courier"/>
-              </a:rPr>
-              <a:t>from =</a:t>
-            </a:r>
-            <a:r>
-              <a:rPr>
-                <a:latin typeface="Courier"/>
-              </a:rPr>
-              <a:t> </a:t>
-            </a:r>
-            <a:r>
-              <a:rPr>
-                <a:solidFill>
-                  <a:srgbClr val="4070A0"/>
-                </a:solidFill>
-                <a:latin typeface="Courier"/>
-              </a:rPr>
-              <a:t>-</a:t>
-            </a:r>
-            <a:r>
-              <a:rPr>
-                <a:solidFill>
-                  <a:srgbClr val="40A070"/>
-                </a:solidFill>
-                <a:latin typeface="Courier"/>
-              </a:rPr>
-              <a:t>5</a:t>
-            </a:r>
-            <a:r>
-              <a:rPr>
-                <a:latin typeface="Courier"/>
-              </a:rPr>
-              <a:t>, </a:t>
-            </a:r>
-            <a:r>
-              <a:rPr>
-                <a:solidFill>
-                  <a:srgbClr val="7D9029"/>
-                </a:solidFill>
-                <a:latin typeface="Courier"/>
-              </a:rPr>
-              <a:t>to =</a:t>
-            </a:r>
-            <a:r>
-              <a:rPr>
-                <a:latin typeface="Courier"/>
-              </a:rPr>
-              <a:t> </a:t>
-            </a:r>
-            <a:r>
-              <a:rPr>
-                <a:solidFill>
-                  <a:srgbClr val="40A070"/>
-                </a:solidFill>
-                <a:latin typeface="Courier"/>
-              </a:rPr>
-              <a:t>5</a:t>
-            </a:r>
-            <a:r>
-              <a:rPr>
-                <a:latin typeface="Courier"/>
-              </a:rPr>
-              <a:t>, </a:t>
-            </a:r>
-            <a:r>
-              <a:rPr>
-                <a:solidFill>
-                  <a:srgbClr val="7D9029"/>
-                </a:solidFill>
-                <a:latin typeface="Courier"/>
-              </a:rPr>
-              <a:t>length.out =</a:t>
-            </a:r>
-            <a:r>
-              <a:rPr>
-                <a:latin typeface="Courier"/>
-              </a:rPr>
-              <a:t> </a:t>
-            </a:r>
-            <a:r>
-              <a:rPr>
-                <a:solidFill>
-                  <a:srgbClr val="40A070"/>
-                </a:solidFill>
-                <a:latin typeface="Courier"/>
-              </a:rPr>
-              <a:t>10</a:t>
-            </a:r>
-            <a:r>
-              <a:rPr>
-                <a:latin typeface="Courier"/>
-              </a:rPr>
-              <a:t>)</a:t>
-            </a:r>
-          </a:p>
-          <a:p>
-            <a:pPr lvl="0" indent="0">
-              <a:buNone/>
-            </a:pPr>
-            <a:r>
-              <a:rPr>
-                <a:latin typeface="Courier"/>
-              </a:rPr>
-              <a:t> [1] -5.0000000 -3.8888889 -2.7777778 -1.6666667 -0.5555556  0.5555556
- [7]  1.6666667  2.7777778  3.8888889  5.0000000</a:t>
+              <a:t>separated by commas</a:t>
+            </a:r>
+          </a:p>
+          <a:p>
+            <a:pPr lvl="0" marL="0" indent="0">
+              <a:buNone/>
+            </a:pPr>
+            <a:r>
+              <a:rPr/>
+              <a:t>Like an </a:t>
+            </a:r>
+            <a:r>
+              <a:rPr b="1"/>
+              <a:t>adverb</a:t>
+            </a:r>
+            <a:r>
+              <a:rPr/>
+              <a:t>.</a:t>
             </a:r>
           </a:p>
         </p:txBody>
@@ -8478,90 +8116,104 @@
             </a:pPr>
             <a:r>
               <a:rPr/>
-              <a:t>Useful</a:t>
-            </a:r>
-            <a:r>
-              <a:rPr/>
-              <a:t> </a:t>
-            </a:r>
-            <a:r>
-              <a:rPr/>
-              <a:t>functions</a:t>
-            </a:r>
-            <a:r>
-              <a:rPr/>
-              <a:t> </a:t>
-            </a:r>
-            <a:r>
-              <a:rPr/>
+              <a:t>Create</a:t>
+            </a:r>
+            <a:r>
+              <a:rPr/>
+              <a:t> </a:t>
+            </a:r>
+            <a:r>
+              <a:rPr/>
+              <a:t>vectors</a:t>
+            </a:r>
+            <a:r>
+              <a:rPr/>
+              <a:t> </a:t>
+            </a:r>
+            <a:r>
+              <a:rPr/>
+              <a:t>with</a:t>
+            </a:r>
+            <a:r>
+              <a:rPr/>
+              <a:t> </a:t>
+            </a:r>
+            <a:r>
+              <a:rPr>
+                <a:latin typeface="Courier"/>
+              </a:rPr>
+              <a:t>seq()</a:t>
+            </a:r>
+          </a:p>
+        </p:txBody>
+      </p:sp>
+      <p:sp>
+        <p:nvSpPr>
+          <p:cNvPr id="3" name="Content Placeholder 2"/>
+          <p:cNvSpPr>
+            <a:spLocks noGrp="1"/>
+          </p:cNvSpPr>
+          <p:nvPr>
+            <p:ph idx="1"/>
+          </p:nvPr>
+        </p:nvSpPr>
+        <p:spPr/>
+        <p:txBody>
+          <a:bodyPr/>
+          <a:lstStyle/>
+          <a:p>
+            <a:pPr lvl="0" marL="0" indent="0">
+              <a:buNone/>
+            </a:pPr>
+            <a:r>
+              <a:rPr/>
+              <a:t>For numeric: </a:t>
+            </a:r>
+            <a:r>
+              <a:rPr>
+                <a:latin typeface="Courier"/>
+              </a:rPr>
+              <a:t>seq()</a:t>
+            </a:r>
+          </a:p>
+          <a:p>
+            <a:pPr lvl="1"/>
+            <a:r>
+              <a:rPr/>
+              <a:t>The </a:t>
+            </a:r>
+            <a:r>
+              <a:rPr>
+                <a:latin typeface="Courier"/>
+              </a:rPr>
+              <a:t>from</a:t>
+            </a:r>
+            <a:r>
+              <a:rPr/>
+              <a:t> argument says what number to start on.</a:t>
+            </a:r>
+            <a:br/>
+          </a:p>
+          <a:p>
+            <a:pPr lvl="1"/>
+            <a:r>
+              <a:rPr/>
+              <a:t>The </a:t>
+            </a:r>
+            <a:r>
+              <a:rPr>
+                <a:latin typeface="Courier"/>
+              </a:rPr>
               <a:t>to</a:t>
             </a:r>
             <a:r>
               <a:rPr/>
-              <a:t> </a:t>
-            </a:r>
-            <a:r>
-              <a:rPr/>
-              <a:t>create</a:t>
-            </a:r>
-            <a:r>
-              <a:rPr/>
-              <a:t> </a:t>
-            </a:r>
-            <a:r>
-              <a:rPr/>
-              <a:t>vectors</a:t>
-            </a:r>
-            <a:r>
-              <a:rPr/>
-              <a:t> </a:t>
-            </a:r>
-            <a:r>
-              <a:rPr>
-                <a:latin typeface="Courier"/>
-              </a:rPr>
-              <a:t>rep()</a:t>
-            </a:r>
-          </a:p>
-        </p:txBody>
-      </p:sp>
-      <p:sp>
-        <p:nvSpPr>
-          <p:cNvPr id="3" name="Content Placeholder 2"/>
-          <p:cNvSpPr>
-            <a:spLocks noGrp="1"/>
-          </p:cNvSpPr>
-          <p:nvPr>
-            <p:ph idx="1"/>
-          </p:nvPr>
-        </p:nvSpPr>
-        <p:spPr/>
-        <p:txBody>
-          <a:bodyPr/>
-          <a:lstStyle/>
-          <a:p>
-            <a:pPr lvl="0" marL="0" indent="0">
-              <a:buNone/>
-            </a:pPr>
-            <a:r>
-              <a:rPr/>
-              <a:t>For character: </a:t>
-            </a:r>
-            <a:r>
-              <a:rPr>
-                <a:latin typeface="Courier"/>
-              </a:rPr>
-              <a:t>rep()</a:t>
-            </a:r>
-            <a:r>
-              <a:rPr/>
-              <a:t> can create very long vectors. Works for creating character and numeric vectors.</a:t>
-            </a:r>
-          </a:p>
-          <a:p>
-            <a:pPr lvl="0" marL="0" indent="0">
-              <a:buNone/>
-            </a:pPr>
+              <a:t> argument says what number to not go above.</a:t>
+            </a:r>
+            <a:br/>
+          </a:p>
+          <a:p>
+            <a:pPr lvl="1"/>
             <a:r>
               <a:rPr/>
               <a:t>The </a:t>
@@ -8570,32 +8222,29 @@
               <a:rPr>
                 <a:latin typeface="Courier"/>
               </a:rPr>
-              <a:t>each</a:t>
-            </a:r>
-            <a:r>
-              <a:rPr/>
-              <a:t> argument specifies how many of each item you want repeated. The </a:t>
-            </a:r>
-            <a:r>
-              <a:rPr>
-                <a:latin typeface="Courier"/>
-              </a:rPr>
-              <a:t>times</a:t>
-            </a:r>
-            <a:r>
-              <a:rPr/>
-              <a:t> argument specifies how many times you want the vector repeated.</a:t>
-            </a:r>
-          </a:p>
-          <a:p>
-            <a:pPr lvl="0" marL="0" indent="0">
-              <a:buNone/>
-            </a:pPr>
-            <a:r>
-              <a:rPr>
-                <a:latin typeface="Courier"/>
-              </a:rPr>
-              <a:t>rep(WHAT_TO_REPEAT, arguments)</a:t>
+              <a:t>by</a:t>
+            </a:r>
+            <a:r>
+              <a:rPr/>
+              <a:t> argument says how much to increment by.</a:t>
+            </a:r>
+            <a:br/>
+          </a:p>
+          <a:p>
+            <a:pPr lvl="1"/>
+            <a:r>
+              <a:rPr/>
+              <a:t>The </a:t>
+            </a:r>
+            <a:r>
+              <a:rPr>
+                <a:latin typeface="Courier"/>
+              </a:rPr>
+              <a:t>length.out</a:t>
+            </a:r>
+            <a:r>
+              <a:rPr/>
+              <a:t> argument says how long the vector should be overall.</a:t>
             </a:r>
           </a:p>
           <a:p>
@@ -8609,7 +8258,7 @@
                 </a:solidFill>
                 <a:latin typeface="Courier"/>
               </a:rPr>
-              <a:t>rep</a:t>
+              <a:t>seq</a:t>
             </a:r>
             <a:r>
               <a:rPr>
@@ -8620,11 +8269,117 @@
             <a:r>
               <a:rPr>
                 <a:solidFill>
+                  <a:srgbClr val="7D9029"/>
+                </a:solidFill>
+                <a:latin typeface="Courier"/>
+              </a:rPr>
+              <a:t>from =</a:t>
+            </a:r>
+            <a:r>
+              <a:rPr>
+                <a:latin typeface="Courier"/>
+              </a:rPr>
+              <a:t> </a:t>
+            </a:r>
+            <a:r>
+              <a:rPr>
+                <a:solidFill>
+                  <a:srgbClr val="40A070"/>
+                </a:solidFill>
+                <a:latin typeface="Courier"/>
+              </a:rPr>
+              <a:t>0</a:t>
+            </a:r>
+            <a:r>
+              <a:rPr>
+                <a:latin typeface="Courier"/>
+              </a:rPr>
+              <a:t>, </a:t>
+            </a:r>
+            <a:r>
+              <a:rPr>
+                <a:solidFill>
+                  <a:srgbClr val="7D9029"/>
+                </a:solidFill>
+                <a:latin typeface="Courier"/>
+              </a:rPr>
+              <a:t>to =</a:t>
+            </a:r>
+            <a:r>
+              <a:rPr>
+                <a:latin typeface="Courier"/>
+              </a:rPr>
+              <a:t> </a:t>
+            </a:r>
+            <a:r>
+              <a:rPr>
+                <a:solidFill>
+                  <a:srgbClr val="40A070"/>
+                </a:solidFill>
+                <a:latin typeface="Courier"/>
+              </a:rPr>
+              <a:t>1</a:t>
+            </a:r>
+            <a:r>
+              <a:rPr>
+                <a:latin typeface="Courier"/>
+              </a:rPr>
+              <a:t>, </a:t>
+            </a:r>
+            <a:r>
+              <a:rPr>
+                <a:solidFill>
+                  <a:srgbClr val="7D9029"/>
+                </a:solidFill>
+                <a:latin typeface="Courier"/>
+              </a:rPr>
+              <a:t>by =</a:t>
+            </a:r>
+            <a:r>
+              <a:rPr>
+                <a:latin typeface="Courier"/>
+              </a:rPr>
+              <a:t> </a:t>
+            </a:r>
+            <a:r>
+              <a:rPr>
+                <a:solidFill>
+                  <a:srgbClr val="40A070"/>
+                </a:solidFill>
+                <a:latin typeface="Courier"/>
+              </a:rPr>
+              <a:t>0.2</a:t>
+            </a:r>
+            <a:r>
+              <a:rPr>
+                <a:latin typeface="Courier"/>
+              </a:rPr>
+              <a:t>)</a:t>
+            </a:r>
+          </a:p>
+          <a:p>
+            <a:pPr lvl="0" indent="0">
+              <a:buNone/>
+            </a:pPr>
+            <a:r>
+              <a:rPr>
+                <a:latin typeface="Courier"/>
+              </a:rPr>
+              <a:t>[1] 0.0 0.2 0.4 0.6 0.8 1.0</a:t>
+            </a:r>
+          </a:p>
+          <a:p>
+            <a:pPr lvl="0" indent="0">
+              <a:buNone/>
+            </a:pPr>
+            <a:r>
+              <a:rPr>
+                <a:solidFill>
                   <a:srgbClr val="06287E"/>
                 </a:solidFill>
                 <a:latin typeface="Courier"/>
               </a:rPr>
-              <a:t>c</a:t>
+              <a:t>seq</a:t>
             </a:r>
             <a:r>
               <a:rPr>
@@ -8635,11 +8390,156 @@
             <a:r>
               <a:rPr>
                 <a:solidFill>
+                  <a:srgbClr val="7D9029"/>
+                </a:solidFill>
+                <a:latin typeface="Courier"/>
+              </a:rPr>
+              <a:t>from =</a:t>
+            </a:r>
+            <a:r>
+              <a:rPr>
+                <a:latin typeface="Courier"/>
+              </a:rPr>
+              <a:t> </a:t>
+            </a:r>
+            <a:r>
+              <a:rPr>
+                <a:solidFill>
+                  <a:srgbClr val="40A070"/>
+                </a:solidFill>
+                <a:latin typeface="Courier"/>
+              </a:rPr>
+              <a:t>0</a:t>
+            </a:r>
+            <a:r>
+              <a:rPr>
+                <a:latin typeface="Courier"/>
+              </a:rPr>
+              <a:t>, </a:t>
+            </a:r>
+            <a:r>
+              <a:rPr>
+                <a:solidFill>
+                  <a:srgbClr val="7D9029"/>
+                </a:solidFill>
+                <a:latin typeface="Courier"/>
+              </a:rPr>
+              <a:t>to =</a:t>
+            </a:r>
+            <a:r>
+              <a:rPr>
+                <a:latin typeface="Courier"/>
+              </a:rPr>
+              <a:t> </a:t>
+            </a:r>
+            <a:r>
+              <a:rPr>
+                <a:solidFill>
+                  <a:srgbClr val="40A070"/>
+                </a:solidFill>
+                <a:latin typeface="Courier"/>
+              </a:rPr>
+              <a:t>10</a:t>
+            </a:r>
+            <a:r>
+              <a:rPr>
+                <a:latin typeface="Courier"/>
+              </a:rPr>
+              <a:t>, </a:t>
+            </a:r>
+            <a:r>
+              <a:rPr>
+                <a:solidFill>
+                  <a:srgbClr val="7D9029"/>
+                </a:solidFill>
+                <a:latin typeface="Courier"/>
+              </a:rPr>
+              <a:t>by =</a:t>
+            </a:r>
+            <a:r>
+              <a:rPr>
+                <a:latin typeface="Courier"/>
+              </a:rPr>
+              <a:t> </a:t>
+            </a:r>
+            <a:r>
+              <a:rPr>
+                <a:solidFill>
+                  <a:srgbClr val="40A070"/>
+                </a:solidFill>
+                <a:latin typeface="Courier"/>
+              </a:rPr>
+              <a:t>1</a:t>
+            </a:r>
+            <a:r>
+              <a:rPr>
+                <a:latin typeface="Courier"/>
+              </a:rPr>
+              <a:t>)</a:t>
+            </a:r>
+          </a:p>
+          <a:p>
+            <a:pPr lvl="0" indent="0">
+              <a:buNone/>
+            </a:pPr>
+            <a:r>
+              <a:rPr>
+                <a:latin typeface="Courier"/>
+              </a:rPr>
+              <a:t> [1]  0  1  2  3  4  5  6  7  8  9 10</a:t>
+            </a:r>
+          </a:p>
+          <a:p>
+            <a:pPr lvl="0" indent="0">
+              <a:buNone/>
+            </a:pPr>
+            <a:r>
+              <a:rPr>
+                <a:solidFill>
+                  <a:srgbClr val="06287E"/>
+                </a:solidFill>
+                <a:latin typeface="Courier"/>
+              </a:rPr>
+              <a:t>seq</a:t>
+            </a:r>
+            <a:r>
+              <a:rPr>
+                <a:latin typeface="Courier"/>
+              </a:rPr>
+              <a:t>(</a:t>
+            </a:r>
+            <a:r>
+              <a:rPr>
+                <a:solidFill>
+                  <a:srgbClr val="7D9029"/>
+                </a:solidFill>
+                <a:latin typeface="Courier"/>
+              </a:rPr>
+              <a:t>from =</a:t>
+            </a:r>
+            <a:r>
+              <a:rPr>
+                <a:latin typeface="Courier"/>
+              </a:rPr>
+              <a:t> </a:t>
+            </a:r>
+            <a:r>
+              <a:rPr>
+                <a:solidFill>
                   <a:srgbClr val="4070A0"/>
                 </a:solidFill>
                 <a:latin typeface="Courier"/>
               </a:rPr>
-              <a:t>"black"</a:t>
+              <a:t>-</a:t>
+            </a:r>
+            <a:r>
+              <a:rPr>
+                <a:solidFill>
+                  <a:srgbClr val="40A070"/>
+                </a:solidFill>
+                <a:latin typeface="Courier"/>
+              </a:rPr>
+              <a:t>5</a:t>
             </a:r>
             <a:r>
               <a:rPr>
@@ -8650,26 +8550,11 @@
             <a:r>
               <a:rPr>
                 <a:solidFill>
-                  <a:srgbClr val="4070A0"/>
-                </a:solidFill>
-                <a:latin typeface="Courier"/>
-              </a:rPr>
-              <a:t>"white"</a:t>
-            </a:r>
-            <a:r>
-              <a:rPr>
-                <a:latin typeface="Courier"/>
-              </a:rPr>
-              <a:t>), </a:t>
-            </a:r>
-            <a:r>
-              <a:rPr>
-                <a:solidFill>
                   <a:srgbClr val="7D9029"/>
                 </a:solidFill>
                 <a:latin typeface="Courier"/>
               </a:rPr>
-              <a:t>each =</a:t>
+              <a:t>to =</a:t>
             </a:r>
             <a:r>
               <a:rPr>
@@ -8684,7 +8569,37 @@
                 </a:solidFill>
                 <a:latin typeface="Courier"/>
               </a:rPr>
-              <a:t>3</a:t>
+              <a:t>5</a:t>
+            </a:r>
+            <a:r>
+              <a:rPr>
+                <a:latin typeface="Courier"/>
+              </a:rPr>
+              <a:t>, </a:t>
+            </a:r>
+            <a:r>
+              <a:rPr>
+                <a:solidFill>
+                  <a:srgbClr val="7D9029"/>
+                </a:solidFill>
+                <a:latin typeface="Courier"/>
+              </a:rPr>
+              <a:t>length.out =</a:t>
+            </a:r>
+            <a:r>
+              <a:rPr>
+                <a:latin typeface="Courier"/>
+              </a:rPr>
+              <a:t> </a:t>
+            </a:r>
+            <a:r>
+              <a:rPr>
+                <a:solidFill>
+                  <a:srgbClr val="40A070"/>
+                </a:solidFill>
+                <a:latin typeface="Courier"/>
+              </a:rPr>
+              <a:t>10</a:t>
             </a:r>
             <a:r>
               <a:rPr>
@@ -8701,249 +8616,8 @@
               <a:rPr>
                 <a:latin typeface="Courier"/>
               </a:rPr>
-              <a:t>[1] "black" "black" "black" "white" "white" "white"</a:t>
-            </a:r>
-          </a:p>
-          <a:p>
-            <a:pPr lvl="0" indent="0">
-              <a:buNone/>
-            </a:pPr>
-            <a:r>
-              <a:rPr>
-                <a:solidFill>
-                  <a:srgbClr val="06287E"/>
-                </a:solidFill>
-                <a:latin typeface="Courier"/>
-              </a:rPr>
-              <a:t>rep</a:t>
-            </a:r>
-            <a:r>
-              <a:rPr>
-                <a:latin typeface="Courier"/>
-              </a:rPr>
-              <a:t>(</a:t>
-            </a:r>
-            <a:r>
-              <a:rPr>
-                <a:solidFill>
-                  <a:srgbClr val="06287E"/>
-                </a:solidFill>
-                <a:latin typeface="Courier"/>
-              </a:rPr>
-              <a:t>c</a:t>
-            </a:r>
-            <a:r>
-              <a:rPr>
-                <a:latin typeface="Courier"/>
-              </a:rPr>
-              <a:t>(</a:t>
-            </a:r>
-            <a:r>
-              <a:rPr>
-                <a:solidFill>
-                  <a:srgbClr val="4070A0"/>
-                </a:solidFill>
-                <a:latin typeface="Courier"/>
-              </a:rPr>
-              <a:t>"black"</a:t>
-            </a:r>
-            <a:r>
-              <a:rPr>
-                <a:latin typeface="Courier"/>
-              </a:rPr>
-              <a:t>, </a:t>
-            </a:r>
-            <a:r>
-              <a:rPr>
-                <a:solidFill>
-                  <a:srgbClr val="4070A0"/>
-                </a:solidFill>
-                <a:latin typeface="Courier"/>
-              </a:rPr>
-              <a:t>"white"</a:t>
-            </a:r>
-            <a:r>
-              <a:rPr>
-                <a:latin typeface="Courier"/>
-              </a:rPr>
-              <a:t>), </a:t>
-            </a:r>
-            <a:r>
-              <a:rPr>
-                <a:solidFill>
-                  <a:srgbClr val="7D9029"/>
-                </a:solidFill>
-                <a:latin typeface="Courier"/>
-              </a:rPr>
-              <a:t>times =</a:t>
-            </a:r>
-            <a:r>
-              <a:rPr>
-                <a:latin typeface="Courier"/>
-              </a:rPr>
-              <a:t> </a:t>
-            </a:r>
-            <a:r>
-              <a:rPr>
-                <a:solidFill>
-                  <a:srgbClr val="40A070"/>
-                </a:solidFill>
-                <a:latin typeface="Courier"/>
-              </a:rPr>
-              <a:t>3</a:t>
-            </a:r>
-            <a:r>
-              <a:rPr>
-                <a:latin typeface="Courier"/>
-              </a:rPr>
-              <a:t>)</a:t>
-            </a:r>
-          </a:p>
-          <a:p>
-            <a:pPr lvl="0" indent="0">
-              <a:buNone/>
-            </a:pPr>
-            <a:r>
-              <a:rPr>
-                <a:latin typeface="Courier"/>
-              </a:rPr>
-              <a:t>[1] "black" "white" "black" "white" "black" "white"</a:t>
-            </a:r>
-          </a:p>
-          <a:p>
-            <a:pPr lvl="0" indent="0">
-              <a:buNone/>
-            </a:pPr>
-            <a:r>
-              <a:rPr>
-                <a:solidFill>
-                  <a:srgbClr val="06287E"/>
-                </a:solidFill>
-                <a:latin typeface="Courier"/>
-              </a:rPr>
-              <a:t>rep</a:t>
-            </a:r>
-            <a:r>
-              <a:rPr>
-                <a:latin typeface="Courier"/>
-              </a:rPr>
-              <a:t>(</a:t>
-            </a:r>
-            <a:r>
-              <a:rPr>
-                <a:solidFill>
-                  <a:srgbClr val="06287E"/>
-                </a:solidFill>
-                <a:latin typeface="Courier"/>
-              </a:rPr>
-              <a:t>c</a:t>
-            </a:r>
-            <a:r>
-              <a:rPr>
-                <a:latin typeface="Courier"/>
-              </a:rPr>
-              <a:t>(</a:t>
-            </a:r>
-            <a:r>
-              <a:rPr>
-                <a:solidFill>
-                  <a:srgbClr val="4070A0"/>
-                </a:solidFill>
-                <a:latin typeface="Courier"/>
-              </a:rPr>
-              <a:t>"black"</a:t>
-            </a:r>
-            <a:r>
-              <a:rPr>
-                <a:latin typeface="Courier"/>
-              </a:rPr>
-              <a:t>, </a:t>
-            </a:r>
-            <a:r>
-              <a:rPr>
-                <a:solidFill>
-                  <a:srgbClr val="4070A0"/>
-                </a:solidFill>
-                <a:latin typeface="Courier"/>
-              </a:rPr>
-              <a:t>"white"</a:t>
-            </a:r>
-            <a:r>
-              <a:rPr>
-                <a:latin typeface="Courier"/>
-              </a:rPr>
-              <a:t>), </a:t>
-            </a:r>
-            <a:r>
-              <a:rPr>
-                <a:solidFill>
-                  <a:srgbClr val="7D9029"/>
-                </a:solidFill>
-                <a:latin typeface="Courier"/>
-              </a:rPr>
-              <a:t>each =</a:t>
-            </a:r>
-            <a:r>
-              <a:rPr>
-                <a:latin typeface="Courier"/>
-              </a:rPr>
-              <a:t> </a:t>
-            </a:r>
-            <a:r>
-              <a:rPr>
-                <a:solidFill>
-                  <a:srgbClr val="40A070"/>
-                </a:solidFill>
-                <a:latin typeface="Courier"/>
-              </a:rPr>
-              <a:t>2</a:t>
-            </a:r>
-            <a:r>
-              <a:rPr>
-                <a:latin typeface="Courier"/>
-              </a:rPr>
-              <a:t>, </a:t>
-            </a:r>
-            <a:r>
-              <a:rPr>
-                <a:solidFill>
-                  <a:srgbClr val="7D9029"/>
-                </a:solidFill>
-                <a:latin typeface="Courier"/>
-              </a:rPr>
-              <a:t>times =</a:t>
-            </a:r>
-            <a:r>
-              <a:rPr>
-                <a:latin typeface="Courier"/>
-              </a:rPr>
-              <a:t> </a:t>
-            </a:r>
-            <a:r>
-              <a:rPr>
-                <a:solidFill>
-                  <a:srgbClr val="40A070"/>
-                </a:solidFill>
-                <a:latin typeface="Courier"/>
-              </a:rPr>
-              <a:t>2</a:t>
-            </a:r>
-            <a:r>
-              <a:rPr>
-                <a:latin typeface="Courier"/>
-              </a:rPr>
-              <a:t>)</a:t>
-            </a:r>
-          </a:p>
-          <a:p>
-            <a:pPr lvl="0" indent="0">
-              <a:buNone/>
-            </a:pPr>
-            <a:r>
-              <a:rPr>
-                <a:latin typeface="Courier"/>
-              </a:rPr>
-              <a:t>[1] "black" "black" "white" "white" "black" "black" "white" "white"</a:t>
+              <a:t> [1] -5.0000000 -3.8888889 -2.7777778 -1.6666667 -0.5555556  0.5555556
+ [7]  1.6666667  2.7777778  3.8888889  5.0000000</a:t>
             </a:r>
           </a:p>
         </p:txBody>
@@ -8990,15 +8664,31 @@
             </a:pPr>
             <a:r>
               <a:rPr/>
-              <a:t>Creating</a:t>
-            </a:r>
-            <a:r>
-              <a:rPr/>
-              <a:t> </a:t>
-            </a:r>
-            <a:r>
-              <a:rPr/>
-              <a:t>numeric</a:t>
+              <a:t>Useful</a:t>
+            </a:r>
+            <a:r>
+              <a:rPr/>
+              <a:t> </a:t>
+            </a:r>
+            <a:r>
+              <a:rPr/>
+              <a:t>functions</a:t>
+            </a:r>
+            <a:r>
+              <a:rPr/>
+              <a:t> </a:t>
+            </a:r>
+            <a:r>
+              <a:rPr/>
+              <a:t>to</a:t>
+            </a:r>
+            <a:r>
+              <a:rPr/>
+              <a:t> </a:t>
+            </a:r>
+            <a:r>
+              <a:rPr/>
+              <a:t>create</a:t>
             </a:r>
             <a:r>
               <a:rPr/>
@@ -9016,7 +8706,7 @@
               <a:rPr>
                 <a:latin typeface="Courier"/>
               </a:rPr>
-              <a:t>sample()</a:t>
+              <a:t>rep()</a:t>
             </a:r>
           </a:p>
         </p:txBody>
@@ -9041,47 +8731,57 @@
             </a:pPr>
             <a:r>
               <a:rPr/>
-              <a:t>You can use the </a:t>
-            </a:r>
-            <a:r>
-              <a:rPr>
-                <a:latin typeface="Courier"/>
-              </a:rPr>
-              <a:t>sample()</a:t>
-            </a:r>
-            <a:r>
-              <a:rPr/>
-              <a:t> function to make a random sequence. The </a:t>
-            </a:r>
-            <a:r>
-              <a:rPr>
-                <a:latin typeface="Courier"/>
-              </a:rPr>
-              <a:t>x</a:t>
-            </a:r>
-            <a:r>
-              <a:rPr/>
-              <a:t> argument specifies what you are sampling from. The </a:t>
-            </a:r>
-            <a:r>
-              <a:rPr>
-                <a:latin typeface="Courier"/>
-              </a:rPr>
-              <a:t>size</a:t>
-            </a:r>
-            <a:r>
-              <a:rPr/>
-              <a:t> argument specifies how many values there should be. The </a:t>
-            </a:r>
-            <a:r>
-              <a:rPr>
-                <a:latin typeface="Courier"/>
-              </a:rPr>
-              <a:t>replace</a:t>
-            </a:r>
-            <a:r>
-              <a:rPr/>
-              <a:t> argument specifies if values should be replaced or not.</a:t>
+              <a:t>For character: </a:t>
+            </a:r>
+            <a:r>
+              <a:rPr>
+                <a:latin typeface="Courier"/>
+              </a:rPr>
+              <a:t>rep()</a:t>
+            </a:r>
+            <a:r>
+              <a:rPr/>
+              <a:t> can create very long vectors. Works for creating character and numeric vectors.</a:t>
+            </a:r>
+          </a:p>
+          <a:p>
+            <a:pPr lvl="0" marL="0" indent="0">
+              <a:buNone/>
+            </a:pPr>
+            <a:r>
+              <a:rPr/>
+              <a:t>The </a:t>
+            </a:r>
+            <a:r>
+              <a:rPr>
+                <a:latin typeface="Courier"/>
+              </a:rPr>
+              <a:t>each</a:t>
+            </a:r>
+            <a:r>
+              <a:rPr/>
+              <a:t> argument specifies how many of each item you want repeated. The </a:t>
+            </a:r>
+            <a:r>
+              <a:rPr>
+                <a:latin typeface="Courier"/>
+              </a:rPr>
+              <a:t>times</a:t>
+            </a:r>
+            <a:r>
+              <a:rPr/>
+              <a:t> argument specifies how many times you want the vector repeated.</a:t>
+            </a:r>
+          </a:p>
+          <a:p>
+            <a:pPr lvl="0" marL="0" indent="0">
+              <a:buNone/>
+            </a:pPr>
+            <a:r>
+              <a:rPr>
+                <a:latin typeface="Courier"/>
+              </a:rPr>
+              <a:t>rep(WHAT_TO_REPEAT, arguments)</a:t>
             </a:r>
           </a:p>
           <a:p>
@@ -9090,33 +8790,12 @@
             </a:pPr>
             <a:r>
               <a:rPr>
-                <a:latin typeface="Courier"/>
-              </a:rPr>
-              <a:t>seq_hun </a:t>
-            </a:r>
-            <a:r>
-              <a:rPr>
-                <a:solidFill>
-                  <a:srgbClr val="007020"/>
-                </a:solidFill>
-                <a:latin typeface="Courier"/>
-              </a:rPr>
-              <a:t>&lt;-</a:t>
-            </a:r>
-            <a:r>
-              <a:rPr>
-                <a:latin typeface="Courier"/>
-              </a:rPr>
-              <a:t> </a:t>
-            </a:r>
-            <a:r>
-              <a:rPr>
                 <a:solidFill>
                   <a:srgbClr val="06287E"/>
                 </a:solidFill>
                 <a:latin typeface="Courier"/>
               </a:rPr>
-              <a:t>seq</a:t>
+              <a:t>rep</a:t>
             </a:r>
             <a:r>
               <a:rPr>
@@ -9127,11 +8806,56 @@
             <a:r>
               <a:rPr>
                 <a:solidFill>
+                  <a:srgbClr val="06287E"/>
+                </a:solidFill>
+                <a:latin typeface="Courier"/>
+              </a:rPr>
+              <a:t>c</a:t>
+            </a:r>
+            <a:r>
+              <a:rPr>
+                <a:latin typeface="Courier"/>
+              </a:rPr>
+              <a:t>(</a:t>
+            </a:r>
+            <a:r>
+              <a:rPr>
+                <a:solidFill>
+                  <a:srgbClr val="4070A0"/>
+                </a:solidFill>
+                <a:latin typeface="Courier"/>
+              </a:rPr>
+              <a:t>"black"</a:t>
+            </a:r>
+            <a:r>
+              <a:rPr>
+                <a:latin typeface="Courier"/>
+              </a:rPr>
+              <a:t>, </a:t>
+            </a:r>
+            <a:r>
+              <a:rPr>
+                <a:solidFill>
+                  <a:srgbClr val="4070A0"/>
+                </a:solidFill>
+                <a:latin typeface="Courier"/>
+              </a:rPr>
+              <a:t>"white"</a:t>
+            </a:r>
+            <a:r>
+              <a:rPr>
+                <a:latin typeface="Courier"/>
+              </a:rPr>
+              <a:t>), </a:t>
+            </a:r>
+            <a:r>
+              <a:rPr>
+                <a:solidFill>
                   <a:srgbClr val="7D9029"/>
                 </a:solidFill>
                 <a:latin typeface="Courier"/>
               </a:rPr>
-              <a:t>from =</a:t>
+              <a:t>each =</a:t>
             </a:r>
             <a:r>
               <a:rPr>
@@ -9146,7 +8870,68 @@
                 </a:solidFill>
                 <a:latin typeface="Courier"/>
               </a:rPr>
-              <a:t>0</a:t>
+              <a:t>3</a:t>
+            </a:r>
+            <a:r>
+              <a:rPr>
+                <a:latin typeface="Courier"/>
+              </a:rPr>
+              <a:t>)</a:t>
+            </a:r>
+          </a:p>
+          <a:p>
+            <a:pPr lvl="0" indent="0">
+              <a:buNone/>
+            </a:pPr>
+            <a:r>
+              <a:rPr>
+                <a:latin typeface="Courier"/>
+              </a:rPr>
+              <a:t>[1] "black" "black" "black" "white" "white" "white"</a:t>
+            </a:r>
+          </a:p>
+          <a:p>
+            <a:pPr lvl="0" indent="0">
+              <a:buNone/>
+            </a:pPr>
+            <a:r>
+              <a:rPr>
+                <a:solidFill>
+                  <a:srgbClr val="06287E"/>
+                </a:solidFill>
+                <a:latin typeface="Courier"/>
+              </a:rPr>
+              <a:t>rep</a:t>
+            </a:r>
+            <a:r>
+              <a:rPr>
+                <a:latin typeface="Courier"/>
+              </a:rPr>
+              <a:t>(</a:t>
+            </a:r>
+            <a:r>
+              <a:rPr>
+                <a:solidFill>
+                  <a:srgbClr val="06287E"/>
+                </a:solidFill>
+                <a:latin typeface="Courier"/>
+              </a:rPr>
+              <a:t>c</a:t>
+            </a:r>
+            <a:r>
+              <a:rPr>
+                <a:latin typeface="Courier"/>
+              </a:rPr>
+              <a:t>(</a:t>
+            </a:r>
+            <a:r>
+              <a:rPr>
+                <a:solidFill>
+                  <a:srgbClr val="4070A0"/>
+                </a:solidFill>
+                <a:latin typeface="Courier"/>
+              </a:rPr>
+              <a:t>"black"</a:t>
             </a:r>
             <a:r>
               <a:rPr>
@@ -9157,11 +8942,26 @@
             <a:r>
               <a:rPr>
                 <a:solidFill>
+                  <a:srgbClr val="4070A0"/>
+                </a:solidFill>
+                <a:latin typeface="Courier"/>
+              </a:rPr>
+              <a:t>"white"</a:t>
+            </a:r>
+            <a:r>
+              <a:rPr>
+                <a:latin typeface="Courier"/>
+              </a:rPr>
+              <a:t>), </a:t>
+            </a:r>
+            <a:r>
+              <a:rPr>
+                <a:solidFill>
                   <a:srgbClr val="7D9029"/>
                 </a:solidFill>
                 <a:latin typeface="Courier"/>
               </a:rPr>
-              <a:t>to =</a:t>
+              <a:t>times =</a:t>
             </a:r>
             <a:r>
               <a:rPr>
@@ -9176,7 +8976,68 @@
                 </a:solidFill>
                 <a:latin typeface="Courier"/>
               </a:rPr>
-              <a:t>100</a:t>
+              <a:t>3</a:t>
+            </a:r>
+            <a:r>
+              <a:rPr>
+                <a:latin typeface="Courier"/>
+              </a:rPr>
+              <a:t>)</a:t>
+            </a:r>
+          </a:p>
+          <a:p>
+            <a:pPr lvl="0" indent="0">
+              <a:buNone/>
+            </a:pPr>
+            <a:r>
+              <a:rPr>
+                <a:latin typeface="Courier"/>
+              </a:rPr>
+              <a:t>[1] "black" "white" "black" "white" "black" "white"</a:t>
+            </a:r>
+          </a:p>
+          <a:p>
+            <a:pPr lvl="0" indent="0">
+              <a:buNone/>
+            </a:pPr>
+            <a:r>
+              <a:rPr>
+                <a:solidFill>
+                  <a:srgbClr val="06287E"/>
+                </a:solidFill>
+                <a:latin typeface="Courier"/>
+              </a:rPr>
+              <a:t>rep</a:t>
+            </a:r>
+            <a:r>
+              <a:rPr>
+                <a:latin typeface="Courier"/>
+              </a:rPr>
+              <a:t>(</a:t>
+            </a:r>
+            <a:r>
+              <a:rPr>
+                <a:solidFill>
+                  <a:srgbClr val="06287E"/>
+                </a:solidFill>
+                <a:latin typeface="Courier"/>
+              </a:rPr>
+              <a:t>c</a:t>
+            </a:r>
+            <a:r>
+              <a:rPr>
+                <a:latin typeface="Courier"/>
+              </a:rPr>
+              <a:t>(</a:t>
+            </a:r>
+            <a:r>
+              <a:rPr>
+                <a:solidFill>
+                  <a:srgbClr val="4070A0"/>
+                </a:solidFill>
+                <a:latin typeface="Courier"/>
+              </a:rPr>
+              <a:t>"black"</a:t>
             </a:r>
             <a:r>
               <a:rPr>
@@ -9187,11 +9048,26 @@
             <a:r>
               <a:rPr>
                 <a:solidFill>
+                  <a:srgbClr val="4070A0"/>
+                </a:solidFill>
+                <a:latin typeface="Courier"/>
+              </a:rPr>
+              <a:t>"white"</a:t>
+            </a:r>
+            <a:r>
+              <a:rPr>
+                <a:latin typeface="Courier"/>
+              </a:rPr>
+              <a:t>), </a:t>
+            </a:r>
+            <a:r>
+              <a:rPr>
+                <a:solidFill>
                   <a:srgbClr val="7D9029"/>
                 </a:solidFill>
                 <a:latin typeface="Courier"/>
               </a:rPr>
-              <a:t>by =</a:t>
+              <a:t>each =</a:t>
             </a:r>
             <a:r>
               <a:rPr>
@@ -9206,7 +9082,37 @@
                 </a:solidFill>
                 <a:latin typeface="Courier"/>
               </a:rPr>
-              <a:t>1</a:t>
+              <a:t>2</a:t>
+            </a:r>
+            <a:r>
+              <a:rPr>
+                <a:latin typeface="Courier"/>
+              </a:rPr>
+              <a:t>, </a:t>
+            </a:r>
+            <a:r>
+              <a:rPr>
+                <a:solidFill>
+                  <a:srgbClr val="7D9029"/>
+                </a:solidFill>
+                <a:latin typeface="Courier"/>
+              </a:rPr>
+              <a:t>times =</a:t>
+            </a:r>
+            <a:r>
+              <a:rPr>
+                <a:latin typeface="Courier"/>
+              </a:rPr>
+              <a:t> </a:t>
+            </a:r>
+            <a:r>
+              <a:rPr>
+                <a:solidFill>
+                  <a:srgbClr val="40A070"/>
+                </a:solidFill>
+                <a:latin typeface="Courier"/>
+              </a:rPr>
+              <a:t>2</a:t>
             </a:r>
             <a:r>
               <a:rPr>
@@ -9214,13 +9120,6 @@
               </a:rPr>
               <a:t>)</a:t>
             </a:r>
-            <a:br/>
-            <a:r>
-              <a:rPr>
-                <a:latin typeface="Courier"/>
-              </a:rPr>
-              <a:t>seq_hun</a:t>
-            </a:r>
           </a:p>
           <a:p>
             <a:pPr lvl="0" indent="0">
@@ -9230,146 +9129,7 @@
               <a:rPr>
                 <a:latin typeface="Courier"/>
               </a:rPr>
-              <a:t>  [1]   0   1   2   3   4   5   6   7   8   9  10  11  12  13  14  15  16  17
- [19]  18  19  20  21  22  23  24  25  26  27  28  29  30  31  32  33  34  35
- [37]  36  37  38  39  40  41  42  43  44  45  46  47  48  49  50  51  52  53
- [55]  54  55  56  57  58  59  60  61  62  63  64  65  66  67  68  69  70  71
- [73]  72  73  74  75  76  77  78  79  80  81  82  83  84  85  86  87  88  89
- [91]  90  91  92  93  94  95  96  97  98  99 100</a:t>
-            </a:r>
-          </a:p>
-          <a:p>
-            <a:pPr lvl="0" indent="0">
-              <a:buNone/>
-            </a:pPr>
-            <a:r>
-              <a:rPr>
-                <a:latin typeface="Courier"/>
-              </a:rPr>
-              <a:t>y </a:t>
-            </a:r>
-            <a:r>
-              <a:rPr>
-                <a:solidFill>
-                  <a:srgbClr val="007020"/>
-                </a:solidFill>
-                <a:latin typeface="Courier"/>
-              </a:rPr>
-              <a:t>&lt;-</a:t>
-            </a:r>
-            <a:r>
-              <a:rPr>
-                <a:latin typeface="Courier"/>
-              </a:rPr>
-              <a:t> </a:t>
-            </a:r>
-            <a:r>
-              <a:rPr>
-                <a:solidFill>
-                  <a:srgbClr val="06287E"/>
-                </a:solidFill>
-                <a:latin typeface="Courier"/>
-              </a:rPr>
-              <a:t>sample</a:t>
-            </a:r>
-            <a:r>
-              <a:rPr>
-                <a:latin typeface="Courier"/>
-              </a:rPr>
-              <a:t>(</a:t>
-            </a:r>
-            <a:r>
-              <a:rPr>
-                <a:solidFill>
-                  <a:srgbClr val="7D9029"/>
-                </a:solidFill>
-                <a:latin typeface="Courier"/>
-              </a:rPr>
-              <a:t>x =</a:t>
-            </a:r>
-            <a:r>
-              <a:rPr>
-                <a:latin typeface="Courier"/>
-              </a:rPr>
-              <a:t> seq_hun, </a:t>
-            </a:r>
-            <a:r>
-              <a:rPr>
-                <a:solidFill>
-                  <a:srgbClr val="7D9029"/>
-                </a:solidFill>
-                <a:latin typeface="Courier"/>
-              </a:rPr>
-              <a:t>size =</a:t>
-            </a:r>
-            <a:r>
-              <a:rPr>
-                <a:latin typeface="Courier"/>
-              </a:rPr>
-              <a:t> </a:t>
-            </a:r>
-            <a:r>
-              <a:rPr>
-                <a:solidFill>
-                  <a:srgbClr val="40A070"/>
-                </a:solidFill>
-                <a:latin typeface="Courier"/>
-              </a:rPr>
-              <a:t>5</a:t>
-            </a:r>
-            <a:r>
-              <a:rPr>
-                <a:latin typeface="Courier"/>
-              </a:rPr>
-              <a:t>, </a:t>
-            </a:r>
-            <a:r>
-              <a:rPr>
-                <a:solidFill>
-                  <a:srgbClr val="7D9029"/>
-                </a:solidFill>
-                <a:latin typeface="Courier"/>
-              </a:rPr>
-              <a:t>replace =</a:t>
-            </a:r>
-            <a:r>
-              <a:rPr>
-                <a:latin typeface="Courier"/>
-              </a:rPr>
-              <a:t> </a:t>
-            </a:r>
-            <a:r>
-              <a:rPr>
-                <a:solidFill>
-                  <a:srgbClr val="880000"/>
-                </a:solidFill>
-                <a:latin typeface="Courier"/>
-              </a:rPr>
-              <a:t>TRUE</a:t>
-            </a:r>
-            <a:r>
-              <a:rPr>
-                <a:latin typeface="Courier"/>
-              </a:rPr>
-              <a:t>)</a:t>
-            </a:r>
-            <a:br/>
-            <a:r>
-              <a:rPr>
-                <a:latin typeface="Courier"/>
-              </a:rPr>
-              <a:t>y</a:t>
-            </a:r>
-          </a:p>
-          <a:p>
-            <a:pPr lvl="0" indent="0">
-              <a:buNone/>
-            </a:pPr>
-            <a:r>
-              <a:rPr>
-                <a:latin typeface="Courier"/>
-              </a:rPr>
-              <a:t>[1] 96 32 66 31 65</a:t>
+              <a:t>[1] "black" "black" "white" "white" "black" "black" "white" "white"</a:t>
             </a:r>
           </a:p>
         </p:txBody>
@@ -9545,39 +9305,33 @@
             </a:pPr>
             <a:r>
               <a:rPr/>
-              <a:t>Installing</a:t>
-            </a:r>
-            <a:r>
-              <a:rPr/>
-              <a:t> </a:t>
-            </a:r>
-            <a:r>
-              <a:rPr/>
-              <a:t>packages</a:t>
-            </a:r>
-            <a:r>
-              <a:rPr/>
-              <a:t> </a:t>
-            </a:r>
-            <a:r>
-              <a:rPr/>
-              <a:t>to</a:t>
-            </a:r>
-            <a:r>
-              <a:rPr/>
-              <a:t> </a:t>
-            </a:r>
-            <a:r>
-              <a:rPr/>
-              <a:t>do</a:t>
-            </a:r>
-            <a:r>
-              <a:rPr/>
-              <a:t> </a:t>
-            </a:r>
-            <a:r>
-              <a:rPr/>
-              <a:t>more!</a:t>
+              <a:t>Creating</a:t>
+            </a:r>
+            <a:r>
+              <a:rPr/>
+              <a:t> </a:t>
+            </a:r>
+            <a:r>
+              <a:rPr/>
+              <a:t>numeric</a:t>
+            </a:r>
+            <a:r>
+              <a:rPr/>
+              <a:t> </a:t>
+            </a:r>
+            <a:r>
+              <a:rPr/>
+              <a:t>vectors</a:t>
+            </a:r>
+            <a:r>
+              <a:rPr/>
+              <a:t> </a:t>
+            </a:r>
+            <a:r>
+              <a:rPr>
+                <a:latin typeface="Courier"/>
+              </a:rPr>
+              <a:t>sample()</a:t>
             </a:r>
           </a:p>
         </p:txBody>
@@ -9602,43 +9356,47 @@
             </a:pPr>
             <a:r>
               <a:rPr/>
-              <a:t>Some functions and data come with R right out of the box (“base R”). We will add more functionality with packages. Think of these like “expansion packs” for R.</a:t>
-            </a:r>
-          </a:p>
-          <a:p>
-            <a:pPr lvl="0" marL="0" indent="0">
-              <a:buNone/>
-            </a:pPr>
-            <a:r>
-              <a:rPr/>
-              <a:t>Must be done </a:t>
-            </a:r>
-            <a:r>
-              <a:rPr b="1"/>
-              <a:t>once</a:t>
-            </a:r>
-            <a:r>
-              <a:rPr/>
-              <a:t> for each installation of R (e.g., version 4.2 &gt;&gt; 4.3).</a:t>
-            </a:r>
-          </a:p>
-          <a:p>
-            <a:pPr lvl="0" marL="0" indent="0">
-              <a:buNone/>
-            </a:pPr>
-            <a:r>
-              <a:rPr/>
-              <a:t>An important package we will use is </a:t>
-            </a:r>
-            <a:r>
-              <a:rPr>
-                <a:latin typeface="Courier"/>
-              </a:rPr>
-              <a:t>tidyverse</a:t>
-            </a:r>
-            <a:r>
-              <a:rPr/>
-              <a:t>. It is a mega-package great for data import, wrangling, and visualization.</a:t>
+              <a:t>You can use the </a:t>
+            </a:r>
+            <a:r>
+              <a:rPr>
+                <a:latin typeface="Courier"/>
+              </a:rPr>
+              <a:t>sample()</a:t>
+            </a:r>
+            <a:r>
+              <a:rPr/>
+              <a:t> function to make a random sequence. The </a:t>
+            </a:r>
+            <a:r>
+              <a:rPr>
+                <a:latin typeface="Courier"/>
+              </a:rPr>
+              <a:t>x</a:t>
+            </a:r>
+            <a:r>
+              <a:rPr/>
+              <a:t> argument specifies what you are sampling from. The </a:t>
+            </a:r>
+            <a:r>
+              <a:rPr>
+                <a:latin typeface="Courier"/>
+              </a:rPr>
+              <a:t>size</a:t>
+            </a:r>
+            <a:r>
+              <a:rPr/>
+              <a:t> argument specifies how many values there should be. The </a:t>
+            </a:r>
+            <a:r>
+              <a:rPr>
+                <a:latin typeface="Courier"/>
+              </a:rPr>
+              <a:t>replace</a:t>
+            </a:r>
+            <a:r>
+              <a:rPr/>
+              <a:t> argument specifies if values should be replaced or not.</a:t>
             </a:r>
           </a:p>
           <a:p>
@@ -9647,12 +9405,33 @@
             </a:pPr>
             <a:r>
               <a:rPr>
+                <a:latin typeface="Courier"/>
+              </a:rPr>
+              <a:t>seq_hun </a:t>
+            </a:r>
+            <a:r>
+              <a:rPr>
+                <a:solidFill>
+                  <a:srgbClr val="007020"/>
+                </a:solidFill>
+                <a:latin typeface="Courier"/>
+              </a:rPr>
+              <a:t>&lt;-</a:t>
+            </a:r>
+            <a:r>
+              <a:rPr>
+                <a:latin typeface="Courier"/>
+              </a:rPr>
+              <a:t> </a:t>
+            </a:r>
+            <a:r>
+              <a:rPr>
                 <a:solidFill>
                   <a:srgbClr val="06287E"/>
                 </a:solidFill>
                 <a:latin typeface="Courier"/>
               </a:rPr>
-              <a:t>install.packages</a:t>
+              <a:t>seq</a:t>
             </a:r>
             <a:r>
               <a:rPr>
@@ -9663,17 +9442,249 @@
             <a:r>
               <a:rPr>
                 <a:solidFill>
-                  <a:srgbClr val="4070A0"/>
-                </a:solidFill>
-                <a:latin typeface="Courier"/>
-              </a:rPr>
-              <a:t>"tidyverse"</a:t>
+                  <a:srgbClr val="7D9029"/>
+                </a:solidFill>
+                <a:latin typeface="Courier"/>
+              </a:rPr>
+              <a:t>from =</a:t>
+            </a:r>
+            <a:r>
+              <a:rPr>
+                <a:latin typeface="Courier"/>
+              </a:rPr>
+              <a:t> </a:t>
+            </a:r>
+            <a:r>
+              <a:rPr>
+                <a:solidFill>
+                  <a:srgbClr val="40A070"/>
+                </a:solidFill>
+                <a:latin typeface="Courier"/>
+              </a:rPr>
+              <a:t>0</a:t>
+            </a:r>
+            <a:r>
+              <a:rPr>
+                <a:latin typeface="Courier"/>
+              </a:rPr>
+              <a:t>, </a:t>
+            </a:r>
+            <a:r>
+              <a:rPr>
+                <a:solidFill>
+                  <a:srgbClr val="7D9029"/>
+                </a:solidFill>
+                <a:latin typeface="Courier"/>
+              </a:rPr>
+              <a:t>to =</a:t>
+            </a:r>
+            <a:r>
+              <a:rPr>
+                <a:latin typeface="Courier"/>
+              </a:rPr>
+              <a:t> </a:t>
+            </a:r>
+            <a:r>
+              <a:rPr>
+                <a:solidFill>
+                  <a:srgbClr val="40A070"/>
+                </a:solidFill>
+                <a:latin typeface="Courier"/>
+              </a:rPr>
+              <a:t>100</a:t>
+            </a:r>
+            <a:r>
+              <a:rPr>
+                <a:latin typeface="Courier"/>
+              </a:rPr>
+              <a:t>, </a:t>
+            </a:r>
+            <a:r>
+              <a:rPr>
+                <a:solidFill>
+                  <a:srgbClr val="7D9029"/>
+                </a:solidFill>
+                <a:latin typeface="Courier"/>
+              </a:rPr>
+              <a:t>by =</a:t>
+            </a:r>
+            <a:r>
+              <a:rPr>
+                <a:latin typeface="Courier"/>
+              </a:rPr>
+              <a:t> </a:t>
+            </a:r>
+            <a:r>
+              <a:rPr>
+                <a:solidFill>
+                  <a:srgbClr val="40A070"/>
+                </a:solidFill>
+                <a:latin typeface="Courier"/>
+              </a:rPr>
+              <a:t>1</a:t>
             </a:r>
             <a:r>
               <a:rPr>
                 <a:latin typeface="Courier"/>
               </a:rPr>
               <a:t>)</a:t>
+            </a:r>
+            <a:br/>
+            <a:r>
+              <a:rPr>
+                <a:latin typeface="Courier"/>
+              </a:rPr>
+              <a:t>seq_hun</a:t>
+            </a:r>
+          </a:p>
+          <a:p>
+            <a:pPr lvl="0" indent="0">
+              <a:buNone/>
+            </a:pPr>
+            <a:r>
+              <a:rPr>
+                <a:latin typeface="Courier"/>
+              </a:rPr>
+              <a:t>  [1]   0   1   2   3   4   5   6   7   8   9  10  11  12  13  14  15  16  17
+ [19]  18  19  20  21  22  23  24  25  26  27  28  29  30  31  32  33  34  35
+ [37]  36  37  38  39  40  41  42  43  44  45  46  47  48  49  50  51  52  53
+ [55]  54  55  56  57  58  59  60  61  62  63  64  65  66  67  68  69  70  71
+ [73]  72  73  74  75  76  77  78  79  80  81  82  83  84  85  86  87  88  89
+ [91]  90  91  92  93  94  95  96  97  98  99 100</a:t>
+            </a:r>
+          </a:p>
+          <a:p>
+            <a:pPr lvl="0" indent="0">
+              <a:buNone/>
+            </a:pPr>
+            <a:r>
+              <a:rPr>
+                <a:latin typeface="Courier"/>
+              </a:rPr>
+              <a:t>y </a:t>
+            </a:r>
+            <a:r>
+              <a:rPr>
+                <a:solidFill>
+                  <a:srgbClr val="007020"/>
+                </a:solidFill>
+                <a:latin typeface="Courier"/>
+              </a:rPr>
+              <a:t>&lt;-</a:t>
+            </a:r>
+            <a:r>
+              <a:rPr>
+                <a:latin typeface="Courier"/>
+              </a:rPr>
+              <a:t> </a:t>
+            </a:r>
+            <a:r>
+              <a:rPr>
+                <a:solidFill>
+                  <a:srgbClr val="06287E"/>
+                </a:solidFill>
+                <a:latin typeface="Courier"/>
+              </a:rPr>
+              <a:t>sample</a:t>
+            </a:r>
+            <a:r>
+              <a:rPr>
+                <a:latin typeface="Courier"/>
+              </a:rPr>
+              <a:t>(</a:t>
+            </a:r>
+            <a:r>
+              <a:rPr>
+                <a:solidFill>
+                  <a:srgbClr val="7D9029"/>
+                </a:solidFill>
+                <a:latin typeface="Courier"/>
+              </a:rPr>
+              <a:t>x =</a:t>
+            </a:r>
+            <a:r>
+              <a:rPr>
+                <a:latin typeface="Courier"/>
+              </a:rPr>
+              <a:t> seq_hun, </a:t>
+            </a:r>
+            <a:r>
+              <a:rPr>
+                <a:solidFill>
+                  <a:srgbClr val="7D9029"/>
+                </a:solidFill>
+                <a:latin typeface="Courier"/>
+              </a:rPr>
+              <a:t>size =</a:t>
+            </a:r>
+            <a:r>
+              <a:rPr>
+                <a:latin typeface="Courier"/>
+              </a:rPr>
+              <a:t> </a:t>
+            </a:r>
+            <a:r>
+              <a:rPr>
+                <a:solidFill>
+                  <a:srgbClr val="40A070"/>
+                </a:solidFill>
+                <a:latin typeface="Courier"/>
+              </a:rPr>
+              <a:t>5</a:t>
+            </a:r>
+            <a:r>
+              <a:rPr>
+                <a:latin typeface="Courier"/>
+              </a:rPr>
+              <a:t>, </a:t>
+            </a:r>
+            <a:r>
+              <a:rPr>
+                <a:solidFill>
+                  <a:srgbClr val="7D9029"/>
+                </a:solidFill>
+                <a:latin typeface="Courier"/>
+              </a:rPr>
+              <a:t>replace =</a:t>
+            </a:r>
+            <a:r>
+              <a:rPr>
+                <a:latin typeface="Courier"/>
+              </a:rPr>
+              <a:t> </a:t>
+            </a:r>
+            <a:r>
+              <a:rPr>
+                <a:solidFill>
+                  <a:srgbClr val="880000"/>
+                </a:solidFill>
+                <a:latin typeface="Courier"/>
+              </a:rPr>
+              <a:t>TRUE</a:t>
+            </a:r>
+            <a:r>
+              <a:rPr>
+                <a:latin typeface="Courier"/>
+              </a:rPr>
+              <a:t>)</a:t>
+            </a:r>
+            <a:br/>
+            <a:r>
+              <a:rPr>
+                <a:latin typeface="Courier"/>
+              </a:rPr>
+              <a:t>y</a:t>
+            </a:r>
+          </a:p>
+          <a:p>
+            <a:pPr lvl="0" indent="0">
+              <a:buNone/>
+            </a:pPr>
+            <a:r>
+              <a:rPr>
+                <a:latin typeface="Courier"/>
+              </a:rPr>
+              <a:t>[1] 56 17 16 41 51</a:t>
             </a:r>
           </a:p>
         </p:txBody>
@@ -9720,7 +9731,7 @@
             </a:pPr>
             <a:r>
               <a:rPr/>
-              <a:t>Loading</a:t>
+              <a:t>Installing</a:t>
             </a:r>
             <a:r>
               <a:rPr/>
@@ -9730,6 +9741,30 @@
               <a:rPr/>
               <a:t>packages</a:t>
             </a:r>
+            <a:r>
+              <a:rPr/>
+              <a:t> </a:t>
+            </a:r>
+            <a:r>
+              <a:rPr/>
+              <a:t>to</a:t>
+            </a:r>
+            <a:r>
+              <a:rPr/>
+              <a:t> </a:t>
+            </a:r>
+            <a:r>
+              <a:rPr/>
+              <a:t>do</a:t>
+            </a:r>
+            <a:r>
+              <a:rPr/>
+              <a:t> </a:t>
+            </a:r>
+            <a:r>
+              <a:rPr/>
+              <a:t>more!</a:t>
+            </a:r>
           </a:p>
         </p:txBody>
       </p:sp>
@@ -9753,7 +9788,7 @@
             </a:pPr>
             <a:r>
               <a:rPr/>
-              <a:t>After installing packages, you will need to “load” them into memory so that you can use them.</a:t>
+              <a:t>Some functions and data come with R right out of the box (“base R”). We will add more functionality with packages. Think of these like “expansion packs” for R.</a:t>
             </a:r>
           </a:p>
           <a:p>
@@ -9762,15 +9797,15 @@
             </a:pPr>
             <a:r>
               <a:rPr/>
-              <a:t>This must be done </a:t>
+              <a:t>Must be done </a:t>
             </a:r>
             <a:r>
               <a:rPr b="1"/>
-              <a:t>every time</a:t>
-            </a:r>
-            <a:r>
-              <a:rPr/>
-              <a:t> you start R.</a:t>
+              <a:t>once</a:t>
+            </a:r>
+            <a:r>
+              <a:rPr/>
+              <a:t> for each installation of R (e.g., version 4.2 &gt;&gt; 4.3).</a:t>
             </a:r>
           </a:p>
           <a:p>
@@ -9779,17 +9814,17 @@
             </a:pPr>
             <a:r>
               <a:rPr/>
-              <a:t>We use a function called </a:t>
-            </a:r>
-            <a:r>
-              <a:rPr>
-                <a:latin typeface="Courier"/>
-              </a:rPr>
-              <a:t>library</a:t>
-            </a:r>
-            <a:r>
-              <a:rPr/>
-              <a:t> to load packages.</a:t>
+              <a:t>An important package we will use is </a:t>
+            </a:r>
+            <a:r>
+              <a:rPr>
+                <a:latin typeface="Courier"/>
+              </a:rPr>
+              <a:t>tidyverse</a:t>
+            </a:r>
+            <a:r>
+              <a:rPr/>
+              <a:t>. It is a mega-package great for data import, wrangling, and visualization.</a:t>
             </a:r>
           </a:p>
           <a:p>
@@ -9803,13 +9838,28 @@
                 </a:solidFill>
                 <a:latin typeface="Courier"/>
               </a:rPr>
-              <a:t>library</a:t>
-            </a:r>
-            <a:r>
-              <a:rPr>
-                <a:latin typeface="Courier"/>
-              </a:rPr>
-              <a:t>(tidyverse)</a:t>
+              <a:t>install.packages</a:t>
+            </a:r>
+            <a:r>
+              <a:rPr>
+                <a:latin typeface="Courier"/>
+              </a:rPr>
+              <a:t>(</a:t>
+            </a:r>
+            <a:r>
+              <a:rPr>
+                <a:solidFill>
+                  <a:srgbClr val="4070A0"/>
+                </a:solidFill>
+                <a:latin typeface="Courier"/>
+              </a:rPr>
+              <a:t>"tidyverse"</a:t>
+            </a:r>
+            <a:r>
+              <a:rPr>
+                <a:latin typeface="Courier"/>
+              </a:rPr>
+              <a:t>)</a:t>
             </a:r>
           </a:p>
         </p:txBody>
@@ -9820,6 +9870,142 @@
 </file>
 
 <file path=ppt/slides/slide42.xml><?xml version="1.0" encoding="utf-8"?>
+<p:sld xmlns:a="http://schemas.openxmlformats.org/drawingml/2006/main" xmlns:r="http://schemas.openxmlformats.org/officeDocument/2006/relationships" xmlns:p="http://schemas.openxmlformats.org/presentationml/2006/main">
+  <p:cSld>
+    <p:spTree>
+      <p:nvGrpSpPr>
+        <p:cNvPr id="1" name=""/>
+        <p:cNvGrpSpPr/>
+        <p:nvPr/>
+      </p:nvGrpSpPr>
+      <p:grpSpPr>
+        <a:xfrm>
+          <a:off x="0" y="0"/>
+          <a:ext cx="0" cy="0"/>
+          <a:chOff x="0" y="0"/>
+          <a:chExt cx="0" cy="0"/>
+        </a:xfrm>
+      </p:grpSpPr>
+      <p:sp>
+        <p:nvSpPr>
+          <p:cNvPr id="2" name="Title 1"/>
+          <p:cNvSpPr>
+            <a:spLocks noGrp="1"/>
+          </p:cNvSpPr>
+          <p:nvPr>
+            <p:ph type="title"/>
+          </p:nvPr>
+        </p:nvSpPr>
+        <p:spPr/>
+        <p:txBody>
+          <a:bodyPr/>
+          <a:lstStyle/>
+          <a:p>
+            <a:pPr lvl="0" marL="0" indent="0">
+              <a:buNone/>
+            </a:pPr>
+            <a:r>
+              <a:rPr/>
+              <a:t>Loading</a:t>
+            </a:r>
+            <a:r>
+              <a:rPr/>
+              <a:t> </a:t>
+            </a:r>
+            <a:r>
+              <a:rPr/>
+              <a:t>packages</a:t>
+            </a:r>
+          </a:p>
+        </p:txBody>
+      </p:sp>
+      <p:sp>
+        <p:nvSpPr>
+          <p:cNvPr id="3" name="Content Placeholder 2"/>
+          <p:cNvSpPr>
+            <a:spLocks noGrp="1"/>
+          </p:cNvSpPr>
+          <p:nvPr>
+            <p:ph idx="1"/>
+          </p:nvPr>
+        </p:nvSpPr>
+        <p:spPr/>
+        <p:txBody>
+          <a:bodyPr/>
+          <a:lstStyle/>
+          <a:p>
+            <a:pPr lvl="0" marL="0" indent="0">
+              <a:buNone/>
+            </a:pPr>
+            <a:r>
+              <a:rPr/>
+              <a:t>After installing packages, you will need to “load” them into memory so that you can use them.</a:t>
+            </a:r>
+          </a:p>
+          <a:p>
+            <a:pPr lvl="0" marL="0" indent="0">
+              <a:buNone/>
+            </a:pPr>
+            <a:r>
+              <a:rPr/>
+              <a:t>This must be done </a:t>
+            </a:r>
+            <a:r>
+              <a:rPr b="1"/>
+              <a:t>every time</a:t>
+            </a:r>
+            <a:r>
+              <a:rPr/>
+              <a:t> you start R.</a:t>
+            </a:r>
+          </a:p>
+          <a:p>
+            <a:pPr lvl="0" marL="0" indent="0">
+              <a:buNone/>
+            </a:pPr>
+            <a:r>
+              <a:rPr/>
+              <a:t>We use a function called </a:t>
+            </a:r>
+            <a:r>
+              <a:rPr>
+                <a:latin typeface="Courier"/>
+              </a:rPr>
+              <a:t>library</a:t>
+            </a:r>
+            <a:r>
+              <a:rPr/>
+              <a:t> to load packages.</a:t>
+            </a:r>
+          </a:p>
+          <a:p>
+            <a:pPr lvl="0" indent="0">
+              <a:buNone/>
+            </a:pPr>
+            <a:r>
+              <a:rPr>
+                <a:solidFill>
+                  <a:srgbClr val="06287E"/>
+                </a:solidFill>
+                <a:latin typeface="Courier"/>
+              </a:rPr>
+              <a:t>library</a:t>
+            </a:r>
+            <a:r>
+              <a:rPr>
+                <a:latin typeface="Courier"/>
+              </a:rPr>
+              <a:t>(tidyverse)</a:t>
+            </a:r>
+          </a:p>
+        </p:txBody>
+      </p:sp>
+    </p:spTree>
+  </p:cSld>
+</p:sld>
+</file>
+
+<file path=ppt/slides/slide43.xml><?xml version="1.0" encoding="utf-8"?>
 <p:sld xmlns:a="http://schemas.openxmlformats.org/drawingml/2006/main" xmlns:r="http://schemas.openxmlformats.org/officeDocument/2006/relationships" xmlns:p="http://schemas.openxmlformats.org/presentationml/2006/main">
   <p:cSld>
     <p:spTree>
@@ -9920,281 +10106,6 @@
 </p:sld>
 </file>
 
-<file path=ppt/slides/slide43.xml><?xml version="1.0" encoding="utf-8"?>
-<p:sld xmlns:a="http://schemas.openxmlformats.org/drawingml/2006/main" xmlns:r="http://schemas.openxmlformats.org/officeDocument/2006/relationships" xmlns:p="http://schemas.openxmlformats.org/presentationml/2006/main">
-  <p:cSld>
-    <p:spTree>
-      <p:nvGrpSpPr>
-        <p:cNvPr id="1" name=""/>
-        <p:cNvGrpSpPr/>
-        <p:nvPr/>
-      </p:nvGrpSpPr>
-      <p:grpSpPr>
-        <a:xfrm>
-          <a:off x="0" y="0"/>
-          <a:ext cx="0" cy="0"/>
-          <a:chOff x="0" y="0"/>
-          <a:chExt cx="0" cy="0"/>
-        </a:xfrm>
-      </p:grpSpPr>
-      <p:sp>
-        <p:nvSpPr>
-          <p:cNvPr id="2" name="Title 1"/>
-          <p:cNvSpPr>
-            <a:spLocks noGrp="1"/>
-          </p:cNvSpPr>
-          <p:nvPr>
-            <p:ph type="title"/>
-          </p:nvPr>
-        </p:nvSpPr>
-        <p:spPr/>
-        <p:txBody>
-          <a:bodyPr/>
-          <a:lstStyle/>
-          <a:p>
-            <a:pPr lvl="0" marL="0" indent="0">
-              <a:buNone/>
-            </a:pPr>
-            <a:r>
-              <a:rPr/>
-              <a:t>Summary</a:t>
-            </a:r>
-          </a:p>
-        </p:txBody>
-      </p:sp>
-      <p:sp>
-        <p:nvSpPr>
-          <p:cNvPr id="3" name="Content Placeholder 2"/>
-          <p:cNvSpPr>
-            <a:spLocks noGrp="1"/>
-          </p:cNvSpPr>
-          <p:nvPr>
-            <p:ph idx="1"/>
-          </p:nvPr>
-        </p:nvSpPr>
-        <p:spPr/>
-        <p:txBody>
-          <a:bodyPr/>
-          <a:lstStyle/>
-          <a:p>
-            <a:pPr lvl="1"/>
-            <a:r>
-              <a:rPr/>
-              <a:t>R functions as a calculator</a:t>
-            </a:r>
-          </a:p>
-          <a:p>
-            <a:pPr lvl="1"/>
-            <a:r>
-              <a:rPr/>
-              <a:t>Use </a:t>
-            </a:r>
-            <a:r>
-              <a:rPr>
-                <a:latin typeface="Courier"/>
-              </a:rPr>
-              <a:t>&lt;-</a:t>
-            </a:r>
-            <a:r>
-              <a:rPr/>
-              <a:t> to save (assign) values to objects. Reassigning allows you to make changes “in place”.</a:t>
-            </a:r>
-          </a:p>
-          <a:p>
-            <a:pPr lvl="1"/>
-            <a:r>
-              <a:rPr/>
-              <a:t>Use </a:t>
-            </a:r>
-            <a:r>
-              <a:rPr>
-                <a:latin typeface="Courier"/>
-              </a:rPr>
-              <a:t>c()</a:t>
-            </a:r>
-            <a:r>
-              <a:rPr/>
-              <a:t> to </a:t>
-            </a:r>
-            <a:r>
-              <a:rPr b="1"/>
-              <a:t>combine</a:t>
-            </a:r>
-            <a:r>
-              <a:rPr/>
-              <a:t> into vectors</a:t>
-            </a:r>
-          </a:p>
-          <a:p>
-            <a:pPr lvl="1"/>
-            <a:r>
-              <a:rPr>
-                <a:latin typeface="Courier"/>
-              </a:rPr>
-              <a:t>length()</a:t>
-            </a:r>
-            <a:r>
-              <a:rPr/>
-              <a:t>, </a:t>
-            </a:r>
-            <a:r>
-              <a:rPr>
-                <a:latin typeface="Courier"/>
-              </a:rPr>
-              <a:t>class()</a:t>
-            </a:r>
-            <a:r>
-              <a:rPr/>
-              <a:t>, and </a:t>
-            </a:r>
-            <a:r>
-              <a:rPr>
-                <a:latin typeface="Courier"/>
-              </a:rPr>
-              <a:t>str()</a:t>
-            </a:r>
-            <a:r>
-              <a:rPr/>
-              <a:t> tell you information about an object</a:t>
-            </a:r>
-          </a:p>
-          <a:p>
-            <a:pPr lvl="1"/>
-            <a:r>
-              <a:rPr/>
-              <a:t>The sequence </a:t>
-            </a:r>
-            <a:r>
-              <a:rPr>
-                <a:latin typeface="Courier"/>
-              </a:rPr>
-              <a:t>seq()</a:t>
-            </a:r>
-            <a:r>
-              <a:rPr/>
-              <a:t> function helps you create numeric vectors (</a:t>
-            </a:r>
-            <a:r>
-              <a:rPr>
-                <a:latin typeface="Courier"/>
-              </a:rPr>
-              <a:t>from</a:t>
-            </a:r>
-            <a:r>
-              <a:rPr/>
-              <a:t>,</a:t>
-            </a:r>
-            <a:r>
-              <a:rPr>
-                <a:latin typeface="Courier"/>
-              </a:rPr>
-              <a:t>to</a:t>
-            </a:r>
-            <a:r>
-              <a:rPr/>
-              <a:t>, </a:t>
-            </a:r>
-            <a:r>
-              <a:rPr>
-                <a:latin typeface="Courier"/>
-              </a:rPr>
-              <a:t>by</a:t>
-            </a:r>
-            <a:r>
-              <a:rPr/>
-              <a:t>, and </a:t>
-            </a:r>
-            <a:r>
-              <a:rPr>
-                <a:latin typeface="Courier"/>
-              </a:rPr>
-              <a:t>length.out</a:t>
-            </a:r>
-            <a:r>
-              <a:rPr/>
-              <a:t> arguments)</a:t>
-            </a:r>
-          </a:p>
-          <a:p>
-            <a:pPr lvl="1"/>
-            <a:r>
-              <a:rPr/>
-              <a:t>The repeat </a:t>
-            </a:r>
-            <a:r>
-              <a:rPr>
-                <a:latin typeface="Courier"/>
-              </a:rPr>
-              <a:t>rep()</a:t>
-            </a:r>
-            <a:r>
-              <a:rPr/>
-              <a:t> function helps you create vectors with the </a:t>
-            </a:r>
-            <a:r>
-              <a:rPr>
-                <a:latin typeface="Courier"/>
-              </a:rPr>
-              <a:t>each</a:t>
-            </a:r>
-            <a:r>
-              <a:rPr/>
-              <a:t> and </a:t>
-            </a:r>
-            <a:r>
-              <a:rPr>
-                <a:latin typeface="Courier"/>
-              </a:rPr>
-              <a:t>times</a:t>
-            </a:r>
-            <a:r>
-              <a:rPr/>
-              <a:t> arguments</a:t>
-            </a:r>
-          </a:p>
-          <a:p>
-            <a:pPr lvl="1"/>
-            <a:r>
-              <a:rPr>
-                <a:latin typeface="Courier"/>
-              </a:rPr>
-              <a:t>sample()</a:t>
-            </a:r>
-            <a:r>
-              <a:rPr/>
-              <a:t> makes random vectors</a:t>
-            </a:r>
-          </a:p>
-          <a:p>
-            <a:pPr lvl="1"/>
-            <a:r>
-              <a:rPr>
-                <a:latin typeface="Courier"/>
-              </a:rPr>
-              <a:t>install.packages()</a:t>
-            </a:r>
-            <a:r>
-              <a:rPr/>
-              <a:t> and </a:t>
-            </a:r>
-            <a:r>
-              <a:rPr>
-                <a:latin typeface="Courier"/>
-              </a:rPr>
-              <a:t>library()</a:t>
-            </a:r>
-            <a:r>
-              <a:rPr/>
-              <a:t> install and load packages, respectively.</a:t>
-            </a:r>
-          </a:p>
-        </p:txBody>
-      </p:sp>
-    </p:spTree>
-  </p:cSld>
-</p:sld>
-</file>
-
 <file path=ppt/slides/slide44.xml><?xml version="1.0" encoding="utf-8"?>
 <p:sld xmlns:a="http://schemas.openxmlformats.org/drawingml/2006/main" xmlns:r="http://schemas.openxmlformats.org/officeDocument/2006/relationships" xmlns:p="http://schemas.openxmlformats.org/presentationml/2006/main">
   <p:cSld>
@@ -10252,48 +10163,215 @@
           <a:bodyPr/>
           <a:lstStyle/>
           <a:p>
-            <a:pPr lvl="0" marL="0" indent="0">
-              <a:buNone/>
-            </a:pPr>
-            <a:r>
-              <a:rPr/>
-              <a:t>🏠 </a:t>
-            </a:r>
-            <a:r>
-              <a:rPr>
-                <a:hlinkClick r:id="rId2"/>
-              </a:rPr>
-              <a:t>Class Website</a:t>
-            </a:r>
-          </a:p>
-          <a:p>
-            <a:pPr lvl="0" marL="0" indent="0">
-              <a:buNone/>
-            </a:pPr>
-            <a:r>
-              <a:rPr/>
-              <a:t>💻 </a:t>
-            </a:r>
-            <a:r>
-              <a:rPr>
-                <a:hlinkClick r:id="rId3"/>
-              </a:rPr>
-              <a:t>Basic R Lab</a:t>
-            </a:r>
-          </a:p>
-          <a:p>
-            <a:pPr lvl="0" marL="0" indent="0">
-              <a:buNone/>
-            </a:pPr>
-            <a:r>
-              <a:rPr/>
-              <a:t>📃 </a:t>
-            </a:r>
-            <a:r>
-              <a:rPr>
-                <a:hlinkClick r:id="rId4"/>
-              </a:rPr>
-              <a:t>Day 1 Cheatsheet</a:t>
+            <a:pPr lvl="1"/>
+            <a:r>
+              <a:rPr/>
+              <a:t>R functions as a calculator</a:t>
+            </a:r>
+          </a:p>
+          <a:p>
+            <a:pPr lvl="1"/>
+            <a:r>
+              <a:rPr/>
+              <a:t>Use </a:t>
+            </a:r>
+            <a:r>
+              <a:rPr>
+                <a:latin typeface="Courier"/>
+              </a:rPr>
+              <a:t>&lt;-</a:t>
+            </a:r>
+            <a:r>
+              <a:rPr/>
+              <a:t> to save (assign) values to objects. Reassigning allows you to make changes “in place”.</a:t>
+            </a:r>
+          </a:p>
+          <a:p>
+            <a:pPr lvl="1"/>
+            <a:r>
+              <a:rPr/>
+              <a:t>Use </a:t>
+            </a:r>
+            <a:r>
+              <a:rPr>
+                <a:latin typeface="Courier"/>
+              </a:rPr>
+              <a:t>c()</a:t>
+            </a:r>
+            <a:r>
+              <a:rPr/>
+              <a:t> to </a:t>
+            </a:r>
+            <a:r>
+              <a:rPr b="1"/>
+              <a:t>combine</a:t>
+            </a:r>
+            <a:r>
+              <a:rPr/>
+              <a:t> into vectors</a:t>
+            </a:r>
+          </a:p>
+          <a:p>
+            <a:pPr lvl="1"/>
+            <a:r>
+              <a:rPr>
+                <a:latin typeface="Courier"/>
+              </a:rPr>
+              <a:t>length()</a:t>
+            </a:r>
+            <a:r>
+              <a:rPr/>
+              <a:t>, </a:t>
+            </a:r>
+            <a:r>
+              <a:rPr>
+                <a:latin typeface="Courier"/>
+              </a:rPr>
+              <a:t>class()</a:t>
+            </a:r>
+            <a:r>
+              <a:rPr/>
+              <a:t>, and </a:t>
+            </a:r>
+            <a:r>
+              <a:rPr>
+                <a:latin typeface="Courier"/>
+              </a:rPr>
+              <a:t>str()</a:t>
+            </a:r>
+            <a:r>
+              <a:rPr/>
+              <a:t> tell you information about an object</a:t>
+            </a:r>
+          </a:p>
+          <a:p>
+            <a:pPr lvl="1"/>
+            <a:r>
+              <a:rPr/>
+              <a:t>The sequence </a:t>
+            </a:r>
+            <a:r>
+              <a:rPr>
+                <a:latin typeface="Courier"/>
+              </a:rPr>
+              <a:t>seq()</a:t>
+            </a:r>
+            <a:r>
+              <a:rPr/>
+              <a:t> function helps you create numeric vectors (</a:t>
+            </a:r>
+            <a:r>
+              <a:rPr>
+                <a:latin typeface="Courier"/>
+              </a:rPr>
+              <a:t>from</a:t>
+            </a:r>
+            <a:r>
+              <a:rPr/>
+              <a:t>,</a:t>
+            </a:r>
+            <a:r>
+              <a:rPr>
+                <a:latin typeface="Courier"/>
+              </a:rPr>
+              <a:t>to</a:t>
+            </a:r>
+            <a:r>
+              <a:rPr/>
+              <a:t>, </a:t>
+            </a:r>
+            <a:r>
+              <a:rPr>
+                <a:latin typeface="Courier"/>
+              </a:rPr>
+              <a:t>by</a:t>
+            </a:r>
+            <a:r>
+              <a:rPr/>
+              <a:t>, and </a:t>
+            </a:r>
+            <a:r>
+              <a:rPr>
+                <a:latin typeface="Courier"/>
+              </a:rPr>
+              <a:t>length.out</a:t>
+            </a:r>
+            <a:r>
+              <a:rPr/>
+              <a:t> arguments)</a:t>
+            </a:r>
+          </a:p>
+          <a:p>
+            <a:pPr lvl="1"/>
+            <a:r>
+              <a:rPr/>
+              <a:t>The repeat </a:t>
+            </a:r>
+            <a:r>
+              <a:rPr>
+                <a:latin typeface="Courier"/>
+              </a:rPr>
+              <a:t>rep()</a:t>
+            </a:r>
+            <a:r>
+              <a:rPr/>
+              <a:t> function helps you create vectors with the </a:t>
+            </a:r>
+            <a:r>
+              <a:rPr>
+                <a:latin typeface="Courier"/>
+              </a:rPr>
+              <a:t>each</a:t>
+            </a:r>
+            <a:r>
+              <a:rPr/>
+              <a:t> and </a:t>
+            </a:r>
+            <a:r>
+              <a:rPr>
+                <a:latin typeface="Courier"/>
+              </a:rPr>
+              <a:t>times</a:t>
+            </a:r>
+            <a:r>
+              <a:rPr/>
+              <a:t> arguments</a:t>
+            </a:r>
+          </a:p>
+          <a:p>
+            <a:pPr lvl="1"/>
+            <a:r>
+              <a:rPr>
+                <a:latin typeface="Courier"/>
+              </a:rPr>
+              <a:t>sample()</a:t>
+            </a:r>
+            <a:r>
+              <a:rPr/>
+              <a:t> makes random vectors</a:t>
+            </a:r>
+          </a:p>
+          <a:p>
+            <a:pPr lvl="1"/>
+            <a:r>
+              <a:rPr>
+                <a:latin typeface="Courier"/>
+              </a:rPr>
+              <a:t>install.packages()</a:t>
+            </a:r>
+            <a:r>
+              <a:rPr/>
+              <a:t> and </a:t>
+            </a:r>
+            <a:r>
+              <a:rPr>
+                <a:latin typeface="Courier"/>
+              </a:rPr>
+              <a:t>library()</a:t>
+            </a:r>
+            <a:r>
+              <a:rPr/>
+              <a:t> install and load packages, respectively.</a:t>
             </a:r>
           </a:p>
         </p:txBody>
@@ -10304,6 +10382,114 @@
 </file>
 
 <file path=ppt/slides/slide45.xml><?xml version="1.0" encoding="utf-8"?>
+<p:sld xmlns:a="http://schemas.openxmlformats.org/drawingml/2006/main" xmlns:r="http://schemas.openxmlformats.org/officeDocument/2006/relationships" xmlns:p="http://schemas.openxmlformats.org/presentationml/2006/main">
+  <p:cSld>
+    <p:spTree>
+      <p:nvGrpSpPr>
+        <p:cNvPr id="1" name=""/>
+        <p:cNvGrpSpPr/>
+        <p:nvPr/>
+      </p:nvGrpSpPr>
+      <p:grpSpPr>
+        <a:xfrm>
+          <a:off x="0" y="0"/>
+          <a:ext cx="0" cy="0"/>
+          <a:chOff x="0" y="0"/>
+          <a:chExt cx="0" cy="0"/>
+        </a:xfrm>
+      </p:grpSpPr>
+      <p:sp>
+        <p:nvSpPr>
+          <p:cNvPr id="2" name="Title 1"/>
+          <p:cNvSpPr>
+            <a:spLocks noGrp="1"/>
+          </p:cNvSpPr>
+          <p:nvPr>
+            <p:ph type="title"/>
+          </p:nvPr>
+        </p:nvSpPr>
+        <p:spPr/>
+        <p:txBody>
+          <a:bodyPr/>
+          <a:lstStyle/>
+          <a:p>
+            <a:pPr lvl="0" marL="0" indent="0">
+              <a:buNone/>
+            </a:pPr>
+            <a:r>
+              <a:rPr/>
+              <a:t>Summary</a:t>
+            </a:r>
+          </a:p>
+        </p:txBody>
+      </p:sp>
+      <p:sp>
+        <p:nvSpPr>
+          <p:cNvPr id="3" name="Content Placeholder 2"/>
+          <p:cNvSpPr>
+            <a:spLocks noGrp="1"/>
+          </p:cNvSpPr>
+          <p:nvPr>
+            <p:ph idx="1"/>
+          </p:nvPr>
+        </p:nvSpPr>
+        <p:spPr/>
+        <p:txBody>
+          <a:bodyPr/>
+          <a:lstStyle/>
+          <a:p>
+            <a:pPr lvl="0" marL="0" indent="0">
+              <a:buNone/>
+            </a:pPr>
+            <a:r>
+              <a:rPr/>
+              <a:t>🏠 </a:t>
+            </a:r>
+            <a:r>
+              <a:rPr>
+                <a:hlinkClick r:id="rId2"/>
+              </a:rPr>
+              <a:t>Class Website</a:t>
+            </a:r>
+          </a:p>
+          <a:p>
+            <a:pPr lvl="0" marL="0" indent="0">
+              <a:buNone/>
+            </a:pPr>
+            <a:r>
+              <a:rPr/>
+              <a:t>💻 </a:t>
+            </a:r>
+            <a:r>
+              <a:rPr>
+                <a:hlinkClick r:id="rId3"/>
+              </a:rPr>
+              <a:t>Basic R Lab</a:t>
+            </a:r>
+          </a:p>
+          <a:p>
+            <a:pPr lvl="0" marL="0" indent="0">
+              <a:buNone/>
+            </a:pPr>
+            <a:r>
+              <a:rPr/>
+              <a:t>📃 </a:t>
+            </a:r>
+            <a:r>
+              <a:rPr>
+                <a:hlinkClick r:id="rId4"/>
+              </a:rPr>
+              <a:t>Day 1 Cheatsheet</a:t>
+            </a:r>
+          </a:p>
+        </p:txBody>
+      </p:sp>
+    </p:spTree>
+  </p:cSld>
+</p:sld>
+</file>
+
+<file path=ppt/slides/slide46.xml><?xml version="1.0" encoding="utf-8"?>
 <p:sld xmlns:a="http://schemas.openxmlformats.org/drawingml/2006/main" xmlns:r="http://schemas.openxmlformats.org/officeDocument/2006/relationships" xmlns:p="http://schemas.openxmlformats.org/presentationml/2006/main">
   <p:cSld>
     <p:spTree>
@@ -10355,7 +10541,7 @@
 </p:sld>
 </file>
 
-<file path=ppt/slides/slide46.xml><?xml version="1.0" encoding="utf-8"?>
+<file path=ppt/slides/slide47.xml><?xml version="1.0" encoding="utf-8"?>
 <p:sld xmlns:a="http://schemas.openxmlformats.org/drawingml/2006/main" xmlns:r="http://schemas.openxmlformats.org/officeDocument/2006/relationships" xmlns:p="http://schemas.openxmlformats.org/presentationml/2006/main">
   <p:cSld>
     <p:spTree>

--- a/modules/Basic_R/Basic_R.pptx
+++ b/modules/Basic_R/Basic_R.pptx
@@ -9854,7 +9854,7 @@
               <a:rPr>
                 <a:latin typeface="Courier"/>
               </a:rPr>
-              <a:t>[1] 56  8 10 64 10</a:t>
+              <a:t>[1] 55 61  3  3 20</a:t>
             </a:r>
           </a:p>
         </p:txBody>
